--- a/docs/prezentacja.pptx
+++ b/docs/prezentacja.pptx
@@ -14,6 +14,7 @@
     <p:sldId id="262" r:id="rId13"/>
     <p:sldId id="263" r:id="rId14"/>
     <p:sldId id="264" r:id="rId15"/>
+    <p:sldId id="265" r:id="rId16"/>
   </p:sldIdLst>
   <p:sldSz cx="12191695" cy="6858000" type="screen4x3"/>
   <p:notesSz cx="6858000" cy="9144000"/>
@@ -3092,7 +3093,7 @@
     <p:bg>
       <p:bgPr>
         <a:solidFill>
-          <a:srgbClr val="2C3E50"/>
+          <a:srgbClr val="2B3A55"/>
         </a:solidFill>
         <a:effectLst/>
       </p:bgPr>
@@ -3112,8 +3113,8 @@
         </p:nvSpPr>
         <p:spPr>
           <a:xfrm>
-            <a:off x="731520" y="1645920"/>
-            <a:ext cx="10728655" cy="1371600"/>
+            <a:off x="1097280" y="1828800"/>
+            <a:ext cx="10058400" cy="1097280"/>
           </a:xfrm>
           <a:prstGeom prst="rect">
             <a:avLst/>
@@ -3127,13 +3128,17 @@
           <a:lstStyle/>
           <a:p>
             <a:pPr algn="ctr">
-              <a:defRPr sz="4400" b="1">
+              <a:spcAft>
+                <a:spcPts val="600"/>
+              </a:spcAft>
+            </a:pPr>
+            <a:r>
+              <a:rPr sz="4800" b="1">
                 <a:solidFill>
                   <a:srgbClr val="FFFFFF"/>
                 </a:solidFill>
-              </a:defRPr>
-            </a:pPr>
-            <a:r>
+                <a:latin typeface="Calibri"/>
+              </a:rPr>
               <a:t>Analiza wypadków drogowych</a:t>
             </a:r>
           </a:p>
@@ -3147,8 +3152,8 @@
         </p:nvSpPr>
         <p:spPr>
           <a:xfrm>
-            <a:off x="731520" y="3017520"/>
-            <a:ext cx="10728655" cy="731520"/>
+            <a:off x="1097280" y="2880360"/>
+            <a:ext cx="10058400" cy="640080"/>
           </a:xfrm>
           <a:prstGeom prst="rect">
             <a:avLst/>
@@ -3162,14 +3167,18 @@
           <a:lstStyle/>
           <a:p>
             <a:pPr algn="ctr">
-              <a:defRPr sz="2800" b="0">
-                <a:solidFill>
-                  <a:srgbClr val="AAAAAA"/>
-                </a:solidFill>
-              </a:defRPr>
-            </a:pPr>
-            <a:r>
-              <a:t>Predykcja stopnia obrażeń</a:t>
+              <a:spcAft>
+                <a:spcPts val="600"/>
+              </a:spcAft>
+            </a:pPr>
+            <a:r>
+              <a:rPr sz="2000" b="0">
+                <a:solidFill>
+                  <a:srgbClr val="C9D4E4"/>
+                </a:solidFill>
+                <a:latin typeface="Calibri"/>
+              </a:rPr>
+              <a:t>Predykcja stopnia obrażeń na danych z Montgomery County, Maryland (2015-2024)</a:t>
             </a:r>
           </a:p>
         </p:txBody>
@@ -3182,8 +3191,8 @@
         </p:nvSpPr>
         <p:spPr>
           <a:xfrm>
-            <a:off x="731520" y="4114800"/>
-            <a:ext cx="10728655" cy="548640"/>
+            <a:off x="1097280" y="4206240"/>
+            <a:ext cx="10058400" cy="1188720"/>
           </a:xfrm>
           <a:prstGeom prst="rect">
             <a:avLst/>
@@ -3197,14 +3206,177 @@
           <a:lstStyle/>
           <a:p>
             <a:pPr algn="ctr">
-              <a:defRPr sz="2200" b="0">
+              <a:spcAft>
+                <a:spcPts val="600"/>
+              </a:spcAft>
+            </a:pPr>
+            <a:r>
+              <a:rPr sz="1800" b="0">
                 <a:solidFill>
                   <a:srgbClr val="FFFFFF"/>
                 </a:solidFill>
-              </a:defRPr>
-            </a:pPr>
-            <a:r>
+                <a:latin typeface="Calibri"/>
+              </a:rPr>
               <a:t>Artur Cichocki  •  Bartosz Pikutin  •  Wiktor Golba</a:t>
+            </a:r>
+          </a:p>
+          <a:p>
+            <a:pPr algn="ctr">
+              <a:spcAft>
+                <a:spcPts val="600"/>
+              </a:spcAft>
+            </a:pPr>
+            <a:r>
+              <a:rPr sz="1500" b="0">
+                <a:solidFill>
+                  <a:srgbClr val="C9D4E4"/>
+                </a:solidFill>
+                <a:latin typeface="Calibri"/>
+              </a:rPr>
+              <a:t>Projekt zaliczeniowy ASI, PJATK 2026</a:t>
+            </a:r>
+          </a:p>
+        </p:txBody>
+      </p:sp>
+    </p:spTree>
+  </p:cSld>
+  <p:clrMapOvr>
+    <a:masterClrMapping/>
+  </p:clrMapOvr>
+</p:sld>
+</file>
+
+<file path=ppt/slides/slide10.xml><?xml version="1.0" encoding="utf-8"?>
+<p:sld xmlns:a="http://schemas.openxmlformats.org/drawingml/2006/main" xmlns:p="http://schemas.openxmlformats.org/presentationml/2006/main" xmlns:r="http://schemas.openxmlformats.org/officeDocument/2006/relationships">
+  <p:cSld>
+    <p:bg>
+      <p:bgPr>
+        <a:solidFill>
+          <a:srgbClr val="2B3A55"/>
+        </a:solidFill>
+        <a:effectLst/>
+      </p:bgPr>
+    </p:bg>
+    <p:spTree>
+      <p:nvGrpSpPr>
+        <p:cNvPr id="1" name=""/>
+        <p:cNvGrpSpPr/>
+        <p:nvPr/>
+      </p:nvGrpSpPr>
+      <p:grpSpPr/>
+      <p:sp>
+        <p:nvSpPr>
+          <p:cNvPr id="2" name="TextBox 1"/>
+          <p:cNvSpPr txBox="1"/>
+          <p:nvPr/>
+        </p:nvSpPr>
+        <p:spPr>
+          <a:xfrm>
+            <a:off x="914400" y="731520"/>
+            <a:ext cx="10332720" cy="731520"/>
+          </a:xfrm>
+          <a:prstGeom prst="rect">
+            <a:avLst/>
+          </a:prstGeom>
+          <a:noFill/>
+        </p:spPr>
+        <p:txBody>
+          <a:bodyPr wrap="square">
+            <a:spAutoFit/>
+          </a:bodyPr>
+          <a:lstStyle/>
+          <a:p>
+            <a:pPr algn="l">
+              <a:spcAft>
+                <a:spcPts val="600"/>
+              </a:spcAft>
+            </a:pPr>
+            <a:r>
+              <a:rPr sz="3400" b="1">
+                <a:solidFill>
+                  <a:srgbClr val="FFFFFF"/>
+                </a:solidFill>
+                <a:latin typeface="Calibri"/>
+              </a:rPr>
+              <a:t>Podsumowanie</a:t>
+            </a:r>
+          </a:p>
+        </p:txBody>
+      </p:sp>
+      <p:sp>
+        <p:nvSpPr>
+          <p:cNvPr id="3" name="TextBox 2"/>
+          <p:cNvSpPr txBox="1"/>
+          <p:nvPr/>
+        </p:nvSpPr>
+        <p:spPr>
+          <a:xfrm>
+            <a:off x="822960" y="1828800"/>
+            <a:ext cx="2560320" cy="822960"/>
+          </a:xfrm>
+          <a:prstGeom prst="rect">
+            <a:avLst/>
+          </a:prstGeom>
+          <a:noFill/>
+        </p:spPr>
+        <p:txBody>
+          <a:bodyPr wrap="square">
+            <a:spAutoFit/>
+          </a:bodyPr>
+          <a:lstStyle/>
+          <a:p>
+            <a:pPr algn="ctr">
+              <a:spcAft>
+                <a:spcPts val="600"/>
+              </a:spcAft>
+            </a:pPr>
+            <a:r>
+              <a:rPr sz="4000" b="1">
+                <a:solidFill>
+                  <a:srgbClr val="FFFFFF"/>
+                </a:solidFill>
+                <a:latin typeface="Calibri"/>
+              </a:rPr>
+              <a:t>172K</a:t>
+            </a:r>
+          </a:p>
+        </p:txBody>
+      </p:sp>
+      <p:sp>
+        <p:nvSpPr>
+          <p:cNvPr id="4" name="TextBox 3"/>
+          <p:cNvSpPr txBox="1"/>
+          <p:nvPr/>
+        </p:nvSpPr>
+        <p:spPr>
+          <a:xfrm>
+            <a:off x="822960" y="2606040"/>
+            <a:ext cx="2560320" cy="457200"/>
+          </a:xfrm>
+          <a:prstGeom prst="rect">
+            <a:avLst/>
+          </a:prstGeom>
+          <a:noFill/>
+        </p:spPr>
+        <p:txBody>
+          <a:bodyPr wrap="square">
+            <a:spAutoFit/>
+          </a:bodyPr>
+          <a:lstStyle/>
+          <a:p>
+            <a:pPr algn="ctr">
+              <a:spcAft>
+                <a:spcPts val="600"/>
+              </a:spcAft>
+            </a:pPr>
+            <a:r>
+              <a:rPr sz="1400" b="0">
+                <a:solidFill>
+                  <a:srgbClr val="C9D4E4"/>
+                </a:solidFill>
+                <a:latin typeface="Calibri"/>
+              </a:rPr>
+              <a:t>wypadków w danych</a:t>
             </a:r>
           </a:p>
         </p:txBody>
@@ -3217,8 +3389,8 @@
         </p:nvSpPr>
         <p:spPr>
           <a:xfrm>
-            <a:off x="731520" y="4846320"/>
-            <a:ext cx="10728655" cy="457200"/>
+            <a:off x="3566160" y="1828800"/>
+            <a:ext cx="2560320" cy="822960"/>
           </a:xfrm>
           <a:prstGeom prst="rect">
             <a:avLst/>
@@ -3232,14 +3404,18 @@
           <a:lstStyle/>
           <a:p>
             <a:pPr algn="ctr">
-              <a:defRPr sz="1600" b="0">
-                <a:solidFill>
-                  <a:srgbClr val="7F8C8D"/>
-                </a:solidFill>
-              </a:defRPr>
-            </a:pPr>
-            <a:r>
-              <a:t>Projekt zaliczeniowy ASI — PJATK</a:t>
+              <a:spcAft>
+                <a:spcPts val="600"/>
+              </a:spcAft>
+            </a:pPr>
+            <a:r>
+              <a:rPr sz="4000" b="1">
+                <a:solidFill>
+                  <a:srgbClr val="FFFFFF"/>
+                </a:solidFill>
+                <a:latin typeface="Calibri"/>
+              </a:rPr>
+              <a:t>5</a:t>
             </a:r>
           </a:p>
         </p:txBody>
@@ -3252,8 +3428,8 @@
         </p:nvSpPr>
         <p:spPr>
           <a:xfrm>
-            <a:off x="731520" y="5303520"/>
-            <a:ext cx="10728655" cy="457200"/>
+            <a:off x="3566160" y="2606040"/>
+            <a:ext cx="2560320" cy="457200"/>
           </a:xfrm>
           <a:prstGeom prst="rect">
             <a:avLst/>
@@ -3267,14 +3443,252 @@
           <a:lstStyle/>
           <a:p>
             <a:pPr algn="ctr">
-              <a:defRPr sz="1400" b="0">
-                <a:solidFill>
-                  <a:srgbClr val="7F8C8D"/>
-                </a:solidFill>
-              </a:defRPr>
-            </a:pPr>
-            <a:r>
-              <a:t>Dane: Montgomery County, Maryland (2015–2024)</a:t>
+              <a:spcAft>
+                <a:spcPts val="600"/>
+              </a:spcAft>
+            </a:pPr>
+            <a:r>
+              <a:rPr sz="1400" b="0">
+                <a:solidFill>
+                  <a:srgbClr val="C9D4E4"/>
+                </a:solidFill>
+                <a:latin typeface="Calibri"/>
+              </a:rPr>
+              <a:t>porównanych modeli</a:t>
+            </a:r>
+          </a:p>
+        </p:txBody>
+      </p:sp>
+      <p:sp>
+        <p:nvSpPr>
+          <p:cNvPr id="7" name="TextBox 6"/>
+          <p:cNvSpPr txBox="1"/>
+          <p:nvPr/>
+        </p:nvSpPr>
+        <p:spPr>
+          <a:xfrm>
+            <a:off x="6309360" y="1828800"/>
+            <a:ext cx="2560320" cy="822960"/>
+          </a:xfrm>
+          <a:prstGeom prst="rect">
+            <a:avLst/>
+          </a:prstGeom>
+          <a:noFill/>
+        </p:spPr>
+        <p:txBody>
+          <a:bodyPr wrap="square">
+            <a:spAutoFit/>
+          </a:bodyPr>
+          <a:lstStyle/>
+          <a:p>
+            <a:pPr algn="ctr">
+              <a:spcAft>
+                <a:spcPts val="600"/>
+              </a:spcAft>
+            </a:pPr>
+            <a:r>
+              <a:rPr sz="4000" b="1">
+                <a:solidFill>
+                  <a:srgbClr val="FFFFFF"/>
+                </a:solidFill>
+                <a:latin typeface="Calibri"/>
+              </a:rPr>
+              <a:t>0.78</a:t>
+            </a:r>
+          </a:p>
+        </p:txBody>
+      </p:sp>
+      <p:sp>
+        <p:nvSpPr>
+          <p:cNvPr id="8" name="TextBox 7"/>
+          <p:cNvSpPr txBox="1"/>
+          <p:nvPr/>
+        </p:nvSpPr>
+        <p:spPr>
+          <a:xfrm>
+            <a:off x="6309360" y="2606040"/>
+            <a:ext cx="2560320" cy="457200"/>
+          </a:xfrm>
+          <a:prstGeom prst="rect">
+            <a:avLst/>
+          </a:prstGeom>
+          <a:noFill/>
+        </p:spPr>
+        <p:txBody>
+          <a:bodyPr wrap="square">
+            <a:spAutoFit/>
+          </a:bodyPr>
+          <a:lstStyle/>
+          <a:p>
+            <a:pPr algn="ctr">
+              <a:spcAft>
+                <a:spcPts val="600"/>
+              </a:spcAft>
+            </a:pPr>
+            <a:r>
+              <a:rPr sz="1400" b="0">
+                <a:solidFill>
+                  <a:srgbClr val="C9D4E4"/>
+                </a:solidFill>
+                <a:latin typeface="Calibri"/>
+              </a:rPr>
+              <a:t>F1 ważone</a:t>
+            </a:r>
+          </a:p>
+        </p:txBody>
+      </p:sp>
+      <p:sp>
+        <p:nvSpPr>
+          <p:cNvPr id="9" name="TextBox 8"/>
+          <p:cNvSpPr txBox="1"/>
+          <p:nvPr/>
+        </p:nvSpPr>
+        <p:spPr>
+          <a:xfrm>
+            <a:off x="9052560" y="1828800"/>
+            <a:ext cx="2560320" cy="822960"/>
+          </a:xfrm>
+          <a:prstGeom prst="rect">
+            <a:avLst/>
+          </a:prstGeom>
+          <a:noFill/>
+        </p:spPr>
+        <p:txBody>
+          <a:bodyPr wrap="square">
+            <a:spAutoFit/>
+          </a:bodyPr>
+          <a:lstStyle/>
+          <a:p>
+            <a:pPr algn="ctr">
+              <a:spcAft>
+                <a:spcPts val="600"/>
+              </a:spcAft>
+            </a:pPr>
+            <a:r>
+              <a:rPr sz="4000" b="1">
+                <a:solidFill>
+                  <a:srgbClr val="FFFFFF"/>
+                </a:solidFill>
+                <a:latin typeface="Calibri"/>
+              </a:rPr>
+              <a:t>+42%</a:t>
+            </a:r>
+          </a:p>
+        </p:txBody>
+      </p:sp>
+      <p:sp>
+        <p:nvSpPr>
+          <p:cNvPr id="10" name="TextBox 9"/>
+          <p:cNvSpPr txBox="1"/>
+          <p:nvPr/>
+        </p:nvSpPr>
+        <p:spPr>
+          <a:xfrm>
+            <a:off x="9052560" y="2606040"/>
+            <a:ext cx="2560320" cy="457200"/>
+          </a:xfrm>
+          <a:prstGeom prst="rect">
+            <a:avLst/>
+          </a:prstGeom>
+          <a:noFill/>
+        </p:spPr>
+        <p:txBody>
+          <a:bodyPr wrap="square">
+            <a:spAutoFit/>
+          </a:bodyPr>
+          <a:lstStyle/>
+          <a:p>
+            <a:pPr algn="ctr">
+              <a:spcAft>
+                <a:spcPts val="600"/>
+              </a:spcAft>
+            </a:pPr>
+            <a:r>
+              <a:rPr sz="1400" b="0">
+                <a:solidFill>
+                  <a:srgbClr val="C9D4E4"/>
+                </a:solidFill>
+                <a:latin typeface="Calibri"/>
+              </a:rPr>
+              <a:t>poprawa F1 makro</a:t>
+            </a:r>
+          </a:p>
+        </p:txBody>
+      </p:sp>
+      <p:sp>
+        <p:nvSpPr>
+          <p:cNvPr id="11" name="TextBox 10"/>
+          <p:cNvSpPr txBox="1"/>
+          <p:nvPr/>
+        </p:nvSpPr>
+        <p:spPr>
+          <a:xfrm>
+            <a:off x="914400" y="3931920"/>
+            <a:ext cx="10332720" cy="1097280"/>
+          </a:xfrm>
+          <a:prstGeom prst="rect">
+            <a:avLst/>
+          </a:prstGeom>
+          <a:noFill/>
+        </p:spPr>
+        <p:txBody>
+          <a:bodyPr wrap="square">
+            <a:spAutoFit/>
+          </a:bodyPr>
+          <a:lstStyle/>
+          <a:p>
+            <a:pPr algn="ctr">
+              <a:spcAft>
+                <a:spcPts val="600"/>
+              </a:spcAft>
+            </a:pPr>
+            <a:r>
+              <a:rPr sz="1900" b="0">
+                <a:solidFill>
+                  <a:srgbClr val="FFFFFF"/>
+                </a:solidFill>
+                <a:latin typeface="Calibri"/>
+              </a:rPr>
+              <a:t>Od surowych danych, przez pipeline Kedro i MLflow, po API z frontendem w Dockerze i CI/CD.</a:t>
+            </a:r>
+          </a:p>
+        </p:txBody>
+      </p:sp>
+      <p:sp>
+        <p:nvSpPr>
+          <p:cNvPr id="12" name="TextBox 11"/>
+          <p:cNvSpPr txBox="1"/>
+          <p:nvPr/>
+        </p:nvSpPr>
+        <p:spPr>
+          <a:xfrm>
+            <a:off x="914400" y="5394960"/>
+            <a:ext cx="10332720" cy="640080"/>
+          </a:xfrm>
+          <a:prstGeom prst="rect">
+            <a:avLst/>
+          </a:prstGeom>
+          <a:noFill/>
+        </p:spPr>
+        <p:txBody>
+          <a:bodyPr wrap="square">
+            <a:spAutoFit/>
+          </a:bodyPr>
+          <a:lstStyle/>
+          <a:p>
+            <a:pPr algn="ctr">
+              <a:spcAft>
+                <a:spcPts val="600"/>
+              </a:spcAft>
+            </a:pPr>
+            <a:r>
+              <a:rPr sz="2400" b="1">
+                <a:solidFill>
+                  <a:srgbClr val="FFFFFF"/>
+                </a:solidFill>
+                <a:latin typeface="Calibri"/>
+              </a:rPr>
+              <a:t>Dziękujemy - pytania?</a:t>
             </a:r>
           </a:p>
         </p:txBody>
@@ -3290,14 +3704,6 @@
 <file path=ppt/slides/slide2.xml><?xml version="1.0" encoding="utf-8"?>
 <p:sld xmlns:a="http://schemas.openxmlformats.org/drawingml/2006/main" xmlns:p="http://schemas.openxmlformats.org/presentationml/2006/main" xmlns:r="http://schemas.openxmlformats.org/officeDocument/2006/relationships">
   <p:cSld>
-    <p:bg>
-      <p:bgPr>
-        <a:solidFill>
-          <a:srgbClr val="FFFFFF"/>
-        </a:solidFill>
-        <a:effectLst/>
-      </p:bgPr>
-    </p:bg>
     <p:spTree>
       <p:nvGrpSpPr>
         <p:cNvPr id="1" name=""/>
@@ -3307,14 +3713,57 @@
       <p:grpSpPr/>
       <p:sp>
         <p:nvSpPr>
-          <p:cNvPr id="2" name="TextBox 1"/>
+          <p:cNvPr id="2" name="Rectangle 1"/>
+          <p:cNvSpPr/>
+          <p:nvPr/>
+        </p:nvSpPr>
+        <p:spPr>
+          <a:xfrm>
+            <a:off x="0" y="0"/>
+            <a:ext cx="12191695" cy="868680"/>
+          </a:xfrm>
+          <a:prstGeom prst="rect">
+            <a:avLst/>
+          </a:prstGeom>
+          <a:solidFill>
+            <a:srgbClr val="2B3A55"/>
+          </a:solidFill>
+          <a:ln>
+            <a:noFill/>
+          </a:ln>
+        </p:spPr>
+        <p:style>
+          <a:lnRef idx="1">
+            <a:schemeClr val="accent1"/>
+          </a:lnRef>
+          <a:fillRef idx="3">
+            <a:schemeClr val="accent1"/>
+          </a:fillRef>
+          <a:effectRef idx="2">
+            <a:schemeClr val="accent1"/>
+          </a:effectRef>
+          <a:fontRef idx="minor">
+            <a:schemeClr val="lt1"/>
+          </a:fontRef>
+        </p:style>
+        <p:txBody>
+          <a:bodyPr rtlCol="0" anchor="ctr"/>
+          <a:lstStyle/>
+          <a:p>
+            <a:pPr algn="ctr"/>
+          </a:p>
+        </p:txBody>
+      </p:sp>
+      <p:sp>
+        <p:nvSpPr>
+          <p:cNvPr id="3" name="TextBox 2"/>
           <p:cNvSpPr txBox="1"/>
           <p:nvPr/>
         </p:nvSpPr>
         <p:spPr>
           <a:xfrm>
-            <a:off x="731520" y="365760"/>
-            <a:ext cx="4572000" cy="640080"/>
+            <a:off x="502920" y="155448"/>
+            <a:ext cx="10515600" cy="640080"/>
           </a:xfrm>
           <a:prstGeom prst="rect">
             <a:avLst/>
@@ -3328,13 +3777,17 @@
           <a:lstStyle/>
           <a:p>
             <a:pPr algn="l">
-              <a:defRPr sz="3600" b="1">
-                <a:solidFill>
-                  <a:srgbClr val="2C3E50"/>
-                </a:solidFill>
-              </a:defRPr>
-            </a:pPr>
-            <a:r>
+              <a:spcAft>
+                <a:spcPts val="600"/>
+              </a:spcAft>
+            </a:pPr>
+            <a:r>
+              <a:rPr sz="3000" b="1">
+                <a:solidFill>
+                  <a:srgbClr val="FFFFFF"/>
+                </a:solidFill>
+                <a:latin typeface="Calibri"/>
+              </a:rPr>
               <a:t>Problem</a:t>
             </a:r>
           </a:p>
@@ -3342,14 +3795,14 @@
       </p:sp>
       <p:sp>
         <p:nvSpPr>
-          <p:cNvPr id="3" name="TextBox 2"/>
+          <p:cNvPr id="4" name="TextBox 3"/>
           <p:cNvSpPr txBox="1"/>
           <p:nvPr/>
         </p:nvSpPr>
         <p:spPr>
           <a:xfrm>
-            <a:off x="731520" y="1188720"/>
-            <a:ext cx="5486400" cy="3657600"/>
+            <a:off x="548640" y="1188720"/>
+            <a:ext cx="5669280" cy="5120640"/>
           </a:xfrm>
           <a:prstGeom prst="rect">
             <a:avLst/>
@@ -3362,97 +3815,110 @@
           </a:bodyPr>
           <a:lstStyle/>
           <a:p>
-            <a:pPr algn="l">
-              <a:defRPr sz="2000" b="0">
-                <a:solidFill>
-                  <a:srgbClr val="2C3E50"/>
-                </a:solidFill>
-              </a:defRPr>
-            </a:pPr>
-            <a:r>
-              <a:t>Cel: na podstawie warunków wypadku przewidzieć stopień obrażeń.</a:t>
-            </a:r>
-          </a:p>
-          <a:p>
             <a:pPr>
-              <a:spcBef>
-                <a:spcPts val="600"/>
-              </a:spcBef>
-              <a:defRPr sz="1000" b="0"/>
-            </a:pPr>
+              <a:spcAft>
+                <a:spcPts val="800"/>
+              </a:spcAft>
+            </a:pPr>
+            <a:r>
+              <a:rPr sz="1800">
+                <a:solidFill>
+                  <a:srgbClr val="595959"/>
+                </a:solidFill>
+                <a:latin typeface="Calibri"/>
+              </a:rPr>
+              <a:t>•  Klasyfikacja: na podstawie warunków wypadku przewidujemy stopień obrażeń.</a:t>
+            </a:r>
           </a:p>
           <a:p>
             <a:pPr>
-              <a:spcBef>
-                <a:spcPts val="600"/>
-              </a:spcBef>
-              <a:defRPr sz="2000" b="1">
-                <a:solidFill>
-                  <a:srgbClr val="2C3E50"/>
-                </a:solidFill>
-              </a:defRPr>
-            </a:pPr>
-            <a:r>
-              <a:t>Dlaczego to ważne:</a:t>
+              <a:spcAft>
+                <a:spcPts val="800"/>
+              </a:spcAft>
+            </a:pPr>
+            <a:r>
+              <a:rPr sz="1800">
+                <a:solidFill>
+                  <a:srgbClr val="595959"/>
+                </a:solidFill>
+                <a:latin typeface="Calibri"/>
+              </a:rPr>
+              <a:t>•  Dlaczego: planowanie bezpieczeństwa ruchu, szybsze dysponowanie służb.</a:t>
             </a:r>
           </a:p>
           <a:p>
             <a:pPr>
-              <a:spcBef>
-                <a:spcPts val="600"/>
-              </a:spcBef>
-              <a:defRPr sz="1800" b="0">
-                <a:solidFill>
-                  <a:srgbClr val="2C3E50"/>
-                </a:solidFill>
-              </a:defRPr>
-            </a:pPr>
-            <a:r>
-              <a:t>•  Planowanie bezpieczeństwa ruchu</a:t>
-            </a:r>
-          </a:p>
-          <a:p>
-            <a:pPr>
-              <a:spcBef>
-                <a:spcPts val="600"/>
-              </a:spcBef>
-              <a:defRPr sz="1800" b="0">
-                <a:solidFill>
-                  <a:srgbClr val="2C3E50"/>
-                </a:solidFill>
-              </a:defRPr>
-            </a:pPr>
-            <a:r>
-              <a:t>•  Lepsze dysponowanie służb ratunkowych</a:t>
-            </a:r>
-          </a:p>
-          <a:p>
-            <a:pPr>
-              <a:spcBef>
-                <a:spcPts val="600"/>
-              </a:spcBef>
-              <a:defRPr sz="1800" b="0">
-                <a:solidFill>
-                  <a:srgbClr val="2C3E50"/>
-                </a:solidFill>
-              </a:defRPr>
-            </a:pPr>
-            <a:r>
-              <a:t>•  Zrozumienie czynników ryzyka</a:t>
-            </a:r>
-          </a:p>
-        </p:txBody>
-      </p:sp>
-      <p:sp>
-        <p:nvSpPr>
-          <p:cNvPr id="4" name="TextBox 3"/>
+              <a:spcAft>
+                <a:spcPts val="800"/>
+              </a:spcAft>
+            </a:pPr>
+            <a:r>
+              <a:rPr sz="1800">
+                <a:solidFill>
+                  <a:srgbClr val="595959"/>
+                </a:solidFill>
+                <a:latin typeface="Calibri"/>
+              </a:rPr>
+              <a:t>•  Wyzwanie: bardzo silne niezbalansowanie klas.</a:t>
+            </a:r>
+          </a:p>
+        </p:txBody>
+      </p:sp>
+      <p:sp>
+        <p:nvSpPr>
+          <p:cNvPr id="5" name="Rectangle 4"/>
+          <p:cNvSpPr/>
+          <p:nvPr/>
+        </p:nvSpPr>
+        <p:spPr>
+          <a:xfrm>
+            <a:off x="6675120" y="1325880"/>
+            <a:ext cx="4937760" cy="3108960"/>
+          </a:xfrm>
+          <a:prstGeom prst="rect">
+            <a:avLst/>
+          </a:prstGeom>
+          <a:solidFill>
+            <a:srgbClr val="F2F4F8"/>
+          </a:solidFill>
+          <a:ln>
+            <a:solidFill>
+              <a:srgbClr val="6C8EBF"/>
+            </a:solidFill>
+          </a:ln>
+        </p:spPr>
+        <p:style>
+          <a:lnRef idx="1">
+            <a:schemeClr val="accent1"/>
+          </a:lnRef>
+          <a:fillRef idx="3">
+            <a:schemeClr val="accent1"/>
+          </a:fillRef>
+          <a:effectRef idx="2">
+            <a:schemeClr val="accent1"/>
+          </a:effectRef>
+          <a:fontRef idx="minor">
+            <a:schemeClr val="lt1"/>
+          </a:fontRef>
+        </p:style>
+        <p:txBody>
+          <a:bodyPr rtlCol="0" anchor="ctr"/>
+          <a:lstStyle/>
+          <a:p>
+            <a:pPr algn="ctr"/>
+          </a:p>
+        </p:txBody>
+      </p:sp>
+      <p:sp>
+        <p:nvSpPr>
+          <p:cNvPr id="6" name="TextBox 5"/>
           <p:cNvSpPr txBox="1"/>
           <p:nvPr/>
         </p:nvSpPr>
         <p:spPr>
           <a:xfrm>
-            <a:off x="6858000" y="1188720"/>
-            <a:ext cx="4572000" cy="3657600"/>
+            <a:off x="6949440" y="1554480"/>
+            <a:ext cx="4480560" cy="2743200"/>
           </a:xfrm>
           <a:prstGeom prst="rect">
             <a:avLst/>
@@ -3466,90 +3932,105 @@
           <a:lstStyle/>
           <a:p>
             <a:pPr algn="l">
-              <a:defRPr sz="2000" b="1">
-                <a:solidFill>
-                  <a:srgbClr val="2C3E50"/>
-                </a:solidFill>
-              </a:defRPr>
-            </a:pPr>
-            <a:r>
+              <a:spcAft>
+                <a:spcPts val="600"/>
+              </a:spcAft>
+            </a:pPr>
+            <a:r>
+              <a:rPr sz="1800" b="1">
+                <a:solidFill>
+                  <a:srgbClr val="2B3A55"/>
+                </a:solidFill>
+                <a:latin typeface="Calibri"/>
+              </a:rPr>
               <a:t>3 klasy:</a:t>
             </a:r>
           </a:p>
           <a:p>
-            <a:pPr>
-              <a:spcBef>
+            <a:pPr algn="l">
+              <a:spcAft>
                 <a:spcPts val="600"/>
-              </a:spcBef>
-              <a:defRPr sz="1000" b="0"/>
-            </a:pPr>
-          </a:p>
-          <a:p>
-            <a:pPr>
-              <a:spcBef>
+              </a:spcAft>
+            </a:pPr>
+            <a:r>
+              <a:rPr sz="1700" b="0">
+                <a:solidFill>
+                  <a:srgbClr val="595959"/>
+                </a:solidFill>
+                <a:latin typeface="Calibri"/>
+              </a:rPr>
+              <a:t>NO_INJURY - brak obrażeń (82%)</a:t>
+            </a:r>
+          </a:p>
+          <a:p>
+            <a:pPr algn="l">
+              <a:spcAft>
                 <a:spcPts val="600"/>
-              </a:spcBef>
-              <a:defRPr sz="2000" b="1">
-                <a:solidFill>
-                  <a:srgbClr val="27AE60"/>
-                </a:solidFill>
-              </a:defRPr>
-            </a:pPr>
-            <a:r>
-              <a:t>NO_INJURY — brak obrażeń (82%)</a:t>
-            </a:r>
-          </a:p>
-          <a:p>
-            <a:pPr>
-              <a:spcBef>
+              </a:spcAft>
+            </a:pPr>
+            <a:r>
+              <a:rPr sz="1700" b="0">
+                <a:solidFill>
+                  <a:srgbClr val="595959"/>
+                </a:solidFill>
+                <a:latin typeface="Calibri"/>
+              </a:rPr>
+              <a:t>MINOR - drobne obrażenia (17%)</a:t>
+            </a:r>
+          </a:p>
+          <a:p>
+            <a:pPr algn="l">
+              <a:spcAft>
                 <a:spcPts val="600"/>
-              </a:spcBef>
-              <a:defRPr sz="2000" b="1">
-                <a:solidFill>
-                  <a:srgbClr val="E6A000"/>
-                </a:solidFill>
-              </a:defRPr>
-            </a:pPr>
-            <a:r>
-              <a:t>MINOR — drobne obrażenia (17%)</a:t>
-            </a:r>
-          </a:p>
-          <a:p>
-            <a:pPr>
-              <a:spcBef>
+              </a:spcAft>
+            </a:pPr>
+            <a:r>
+              <a:rPr sz="1700" b="1">
+                <a:solidFill>
+                  <a:srgbClr val="D6804F"/>
+                </a:solidFill>
+                <a:latin typeface="Calibri"/>
+              </a:rPr>
+              <a:t>SERIOUS - poważne / zgon (1%)</a:t>
+            </a:r>
+          </a:p>
+        </p:txBody>
+      </p:sp>
+      <p:sp>
+        <p:nvSpPr>
+          <p:cNvPr id="7" name="TextBox 6"/>
+          <p:cNvSpPr txBox="1"/>
+          <p:nvPr/>
+        </p:nvSpPr>
+        <p:spPr>
+          <a:xfrm>
+            <a:off x="548640" y="5120640"/>
+            <a:ext cx="10972800" cy="731520"/>
+          </a:xfrm>
+          <a:prstGeom prst="rect">
+            <a:avLst/>
+          </a:prstGeom>
+          <a:noFill/>
+        </p:spPr>
+        <p:txBody>
+          <a:bodyPr wrap="square">
+            <a:spAutoFit/>
+          </a:bodyPr>
+          <a:lstStyle/>
+          <a:p>
+            <a:pPr algn="l">
+              <a:spcAft>
                 <a:spcPts val="600"/>
-              </a:spcBef>
-              <a:defRPr sz="2000" b="1">
-                <a:solidFill>
-                  <a:srgbClr val="E74C3C"/>
-                </a:solidFill>
-              </a:defRPr>
-            </a:pPr>
-            <a:r>
-              <a:t>SERIOUS — poważne / zgon (1%)</a:t>
-            </a:r>
-          </a:p>
-          <a:p>
-            <a:pPr>
-              <a:spcBef>
-                <a:spcPts val="600"/>
-              </a:spcBef>
-              <a:defRPr sz="1000" b="0"/>
-            </a:pPr>
-          </a:p>
-          <a:p>
-            <a:pPr>
-              <a:spcBef>
-                <a:spcPts val="600"/>
-              </a:spcBef>
-              <a:defRPr sz="1600" b="0">
-                <a:solidFill>
-                  <a:srgbClr val="7F8C8D"/>
-                </a:solidFill>
-              </a:defRPr>
-            </a:pPr>
-            <a:r>
-              <a:t>Problem: silna nierównowaga klas</a:t>
+              </a:spcAft>
+            </a:pPr>
+            <a:r>
+              <a:rPr sz="1700" b="1">
+                <a:solidFill>
+                  <a:srgbClr val="2B3A55"/>
+                </a:solidFill>
+                <a:latin typeface="Calibri"/>
+              </a:rPr>
+              <a:t>Klasa SERIOUS to ~1% danych, dlatego naszą główną metryką jest F1 makro, a nie accuracy.</a:t>
             </a:r>
           </a:p>
         </p:txBody>
@@ -3565,14 +4046,6 @@
 <file path=ppt/slides/slide3.xml><?xml version="1.0" encoding="utf-8"?>
 <p:sld xmlns:a="http://schemas.openxmlformats.org/drawingml/2006/main" xmlns:p="http://schemas.openxmlformats.org/presentationml/2006/main" xmlns:r="http://schemas.openxmlformats.org/officeDocument/2006/relationships">
   <p:cSld>
-    <p:bg>
-      <p:bgPr>
-        <a:solidFill>
-          <a:srgbClr val="FFFFFF"/>
-        </a:solidFill>
-        <a:effectLst/>
-      </p:bgPr>
-    </p:bg>
     <p:spTree>
       <p:nvGrpSpPr>
         <p:cNvPr id="1" name=""/>
@@ -3582,14 +4055,57 @@
       <p:grpSpPr/>
       <p:sp>
         <p:nvSpPr>
-          <p:cNvPr id="2" name="TextBox 1"/>
+          <p:cNvPr id="2" name="Rectangle 1"/>
+          <p:cNvSpPr/>
+          <p:nvPr/>
+        </p:nvSpPr>
+        <p:spPr>
+          <a:xfrm>
+            <a:off x="0" y="0"/>
+            <a:ext cx="12191695" cy="868680"/>
+          </a:xfrm>
+          <a:prstGeom prst="rect">
+            <a:avLst/>
+          </a:prstGeom>
+          <a:solidFill>
+            <a:srgbClr val="2B3A55"/>
+          </a:solidFill>
+          <a:ln>
+            <a:noFill/>
+          </a:ln>
+        </p:spPr>
+        <p:style>
+          <a:lnRef idx="1">
+            <a:schemeClr val="accent1"/>
+          </a:lnRef>
+          <a:fillRef idx="3">
+            <a:schemeClr val="accent1"/>
+          </a:fillRef>
+          <a:effectRef idx="2">
+            <a:schemeClr val="accent1"/>
+          </a:effectRef>
+          <a:fontRef idx="minor">
+            <a:schemeClr val="lt1"/>
+          </a:fontRef>
+        </p:style>
+        <p:txBody>
+          <a:bodyPr rtlCol="0" anchor="ctr"/>
+          <a:lstStyle/>
+          <a:p>
+            <a:pPr algn="ctr"/>
+          </a:p>
+        </p:txBody>
+      </p:sp>
+      <p:sp>
+        <p:nvSpPr>
+          <p:cNvPr id="3" name="TextBox 2"/>
           <p:cNvSpPr txBox="1"/>
           <p:nvPr/>
         </p:nvSpPr>
         <p:spPr>
           <a:xfrm>
-            <a:off x="731520" y="365760"/>
-            <a:ext cx="4572000" cy="640080"/>
+            <a:off x="502920" y="155448"/>
+            <a:ext cx="10515600" cy="640080"/>
           </a:xfrm>
           <a:prstGeom prst="rect">
             <a:avLst/>
@@ -3603,13 +4119,17 @@
           <a:lstStyle/>
           <a:p>
             <a:pPr algn="l">
-              <a:defRPr sz="3600" b="1">
-                <a:solidFill>
-                  <a:srgbClr val="2C3E50"/>
-                </a:solidFill>
-              </a:defRPr>
-            </a:pPr>
-            <a:r>
+              <a:spcAft>
+                <a:spcPts val="600"/>
+              </a:spcAft>
+            </a:pPr>
+            <a:r>
+              <a:rPr sz="3000" b="1">
+                <a:solidFill>
+                  <a:srgbClr val="FFFFFF"/>
+                </a:solidFill>
+                <a:latin typeface="Calibri"/>
+              </a:rPr>
               <a:t>Zbiór danych</a:t>
             </a:r>
           </a:p>
@@ -3617,14 +4137,14 @@
       </p:sp>
       <p:sp>
         <p:nvSpPr>
-          <p:cNvPr id="3" name="TextBox 2"/>
+          <p:cNvPr id="4" name="TextBox 3"/>
           <p:cNvSpPr txBox="1"/>
           <p:nvPr/>
         </p:nvSpPr>
         <p:spPr>
           <a:xfrm>
-            <a:off x="1371600" y="1371600"/>
-            <a:ext cx="2743200" cy="731520"/>
+            <a:off x="731520" y="1371600"/>
+            <a:ext cx="2377440" cy="822960"/>
           </a:xfrm>
           <a:prstGeom prst="rect">
             <a:avLst/>
@@ -3638,13 +4158,17 @@
           <a:lstStyle/>
           <a:p>
             <a:pPr algn="ctr">
-              <a:defRPr sz="4000" b="1">
-                <a:solidFill>
-                  <a:srgbClr val="3498DB"/>
-                </a:solidFill>
-              </a:defRPr>
-            </a:pPr>
-            <a:r>
+              <a:spcAft>
+                <a:spcPts val="600"/>
+              </a:spcAft>
+            </a:pPr>
+            <a:r>
+              <a:rPr sz="4000" b="1">
+                <a:solidFill>
+                  <a:srgbClr val="6C8EBF"/>
+                </a:solidFill>
+                <a:latin typeface="Calibri"/>
+              </a:rPr>
               <a:t>172 105</a:t>
             </a:r>
           </a:p>
@@ -3652,14 +4176,14 @@
       </p:sp>
       <p:sp>
         <p:nvSpPr>
-          <p:cNvPr id="4" name="TextBox 3"/>
+          <p:cNvPr id="5" name="TextBox 4"/>
           <p:cNvSpPr txBox="1"/>
           <p:nvPr/>
         </p:nvSpPr>
         <p:spPr>
           <a:xfrm>
-            <a:off x="1371600" y="2103120"/>
-            <a:ext cx="2743200" cy="457200"/>
+            <a:off x="731520" y="2057400"/>
+            <a:ext cx="2377440" cy="457200"/>
           </a:xfrm>
           <a:prstGeom prst="rect">
             <a:avLst/>
@@ -3673,13 +4197,17 @@
           <a:lstStyle/>
           <a:p>
             <a:pPr algn="ctr">
-              <a:defRPr sz="1800" b="0">
-                <a:solidFill>
-                  <a:srgbClr val="7F8C8D"/>
-                </a:solidFill>
-              </a:defRPr>
-            </a:pPr>
-            <a:r>
+              <a:spcAft>
+                <a:spcPts val="600"/>
+              </a:spcAft>
+            </a:pPr>
+            <a:r>
+              <a:rPr sz="1400" b="0">
+                <a:solidFill>
+                  <a:srgbClr val="595959"/>
+                </a:solidFill>
+                <a:latin typeface="Calibri"/>
+              </a:rPr>
               <a:t>rekordów</a:t>
             </a:r>
           </a:p>
@@ -3687,14 +4215,14 @@
       </p:sp>
       <p:sp>
         <p:nvSpPr>
-          <p:cNvPr id="5" name="TextBox 4"/>
+          <p:cNvPr id="6" name="TextBox 5"/>
           <p:cNvSpPr txBox="1"/>
           <p:nvPr/>
         </p:nvSpPr>
         <p:spPr>
           <a:xfrm>
-            <a:off x="4572000" y="1371600"/>
-            <a:ext cx="2743200" cy="731520"/>
+            <a:off x="3291840" y="1371600"/>
+            <a:ext cx="2377440" cy="822960"/>
           </a:xfrm>
           <a:prstGeom prst="rect">
             <a:avLst/>
@@ -3708,13 +4236,17 @@
           <a:lstStyle/>
           <a:p>
             <a:pPr algn="ctr">
-              <a:defRPr sz="4000" b="1">
-                <a:solidFill>
-                  <a:srgbClr val="3498DB"/>
-                </a:solidFill>
-              </a:defRPr>
-            </a:pPr>
-            <a:r>
+              <a:spcAft>
+                <a:spcPts val="600"/>
+              </a:spcAft>
+            </a:pPr>
+            <a:r>
+              <a:rPr sz="4000" b="1">
+                <a:solidFill>
+                  <a:srgbClr val="6C8EBF"/>
+                </a:solidFill>
+                <a:latin typeface="Calibri"/>
+              </a:rPr>
               <a:t>43</a:t>
             </a:r>
           </a:p>
@@ -3722,14 +4254,14 @@
       </p:sp>
       <p:sp>
         <p:nvSpPr>
-          <p:cNvPr id="6" name="TextBox 5"/>
+          <p:cNvPr id="7" name="TextBox 6"/>
           <p:cNvSpPr txBox="1"/>
           <p:nvPr/>
         </p:nvSpPr>
         <p:spPr>
           <a:xfrm>
-            <a:off x="4572000" y="2103120"/>
-            <a:ext cx="2743200" cy="457200"/>
+            <a:off x="3291840" y="2057400"/>
+            <a:ext cx="2377440" cy="457200"/>
           </a:xfrm>
           <a:prstGeom prst="rect">
             <a:avLst/>
@@ -3743,13 +4275,17 @@
           <a:lstStyle/>
           <a:p>
             <a:pPr algn="ctr">
-              <a:defRPr sz="1800" b="0">
-                <a:solidFill>
-                  <a:srgbClr val="7F8C8D"/>
-                </a:solidFill>
-              </a:defRPr>
-            </a:pPr>
-            <a:r>
+              <a:spcAft>
+                <a:spcPts val="600"/>
+              </a:spcAft>
+            </a:pPr>
+            <a:r>
+              <a:rPr sz="1400" b="0">
+                <a:solidFill>
+                  <a:srgbClr val="595959"/>
+                </a:solidFill>
+                <a:latin typeface="Calibri"/>
+              </a:rPr>
               <a:t>kolumny</a:t>
             </a:r>
           </a:p>
@@ -3757,14 +4293,14 @@
       </p:sp>
       <p:sp>
         <p:nvSpPr>
-          <p:cNvPr id="7" name="TextBox 6"/>
+          <p:cNvPr id="8" name="TextBox 7"/>
           <p:cNvSpPr txBox="1"/>
           <p:nvPr/>
         </p:nvSpPr>
         <p:spPr>
           <a:xfrm>
-            <a:off x="7772400" y="1371600"/>
-            <a:ext cx="2743200" cy="731520"/>
+            <a:off x="5852160" y="1371600"/>
+            <a:ext cx="2377440" cy="822960"/>
           </a:xfrm>
           <a:prstGeom prst="rect">
             <a:avLst/>
@@ -3778,13 +4314,17 @@
           <a:lstStyle/>
           <a:p>
             <a:pPr algn="ctr">
-              <a:defRPr sz="4000" b="1">
-                <a:solidFill>
-                  <a:srgbClr val="3498DB"/>
-                </a:solidFill>
-              </a:defRPr>
-            </a:pPr>
-            <a:r>
+              <a:spcAft>
+                <a:spcPts val="600"/>
+              </a:spcAft>
+            </a:pPr>
+            <a:r>
+              <a:rPr sz="4000" b="1">
+                <a:solidFill>
+                  <a:srgbClr val="6C8EBF"/>
+                </a:solidFill>
+                <a:latin typeface="Calibri"/>
+              </a:rPr>
               <a:t>10 lat</a:t>
             </a:r>
           </a:p>
@@ -3792,14 +4332,14 @@
       </p:sp>
       <p:sp>
         <p:nvSpPr>
-          <p:cNvPr id="8" name="TextBox 7"/>
+          <p:cNvPr id="9" name="TextBox 8"/>
           <p:cNvSpPr txBox="1"/>
           <p:nvPr/>
         </p:nvSpPr>
         <p:spPr>
           <a:xfrm>
-            <a:off x="7772400" y="2103120"/>
-            <a:ext cx="2743200" cy="457200"/>
+            <a:off x="5852160" y="2057400"/>
+            <a:ext cx="2377440" cy="457200"/>
           </a:xfrm>
           <a:prstGeom prst="rect">
             <a:avLst/>
@@ -3813,28 +4353,32 @@
           <a:lstStyle/>
           <a:p>
             <a:pPr algn="ctr">
-              <a:defRPr sz="1800" b="0">
-                <a:solidFill>
-                  <a:srgbClr val="7F8C8D"/>
-                </a:solidFill>
-              </a:defRPr>
-            </a:pPr>
-            <a:r>
-              <a:t>danych</a:t>
-            </a:r>
-          </a:p>
-        </p:txBody>
-      </p:sp>
-      <p:sp>
-        <p:nvSpPr>
-          <p:cNvPr id="9" name="TextBox 8"/>
+              <a:spcAft>
+                <a:spcPts val="600"/>
+              </a:spcAft>
+            </a:pPr>
+            <a:r>
+              <a:rPr sz="1400" b="0">
+                <a:solidFill>
+                  <a:srgbClr val="595959"/>
+                </a:solidFill>
+                <a:latin typeface="Calibri"/>
+              </a:rPr>
+              <a:t>danych (2015-2024)</a:t>
+            </a:r>
+          </a:p>
+        </p:txBody>
+      </p:sp>
+      <p:sp>
+        <p:nvSpPr>
+          <p:cNvPr id="10" name="TextBox 9"/>
           <p:cNvSpPr txBox="1"/>
           <p:nvPr/>
         </p:nvSpPr>
         <p:spPr>
           <a:xfrm>
-            <a:off x="731520" y="3017520"/>
-            <a:ext cx="5486400" cy="3200400"/>
+            <a:off x="8412480" y="1371600"/>
+            <a:ext cx="2377440" cy="822960"/>
           </a:xfrm>
           <a:prstGeom prst="rect">
             <a:avLst/>
@@ -3847,89 +4391,33 @@
           </a:bodyPr>
           <a:lstStyle/>
           <a:p>
-            <a:pPr algn="l">
-              <a:defRPr sz="2000" b="1">
-                <a:solidFill>
-                  <a:srgbClr val="2C3E50"/>
-                </a:solidFill>
-              </a:defRPr>
-            </a:pPr>
-            <a:r>
-              <a:t>Ważniejsze cechy:</a:t>
-            </a:r>
-          </a:p>
-          <a:p>
-            <a:pPr>
-              <a:spcBef>
+            <a:pPr algn="ctr">
+              <a:spcAft>
                 <a:spcPts val="600"/>
-              </a:spcBef>
-              <a:defRPr sz="1700" b="0">
-                <a:solidFill>
-                  <a:srgbClr val="2C3E50"/>
-                </a:solidFill>
-              </a:defRPr>
-            </a:pPr>
-            <a:r>
-              <a:t>•  Pogoda, oświetlenie, stan nawierzchni</a:t>
-            </a:r>
-          </a:p>
-          <a:p>
-            <a:pPr>
-              <a:spcBef>
-                <a:spcPts val="600"/>
-              </a:spcBef>
-              <a:defRPr sz="1700" b="0">
-                <a:solidFill>
-                  <a:srgbClr val="2C3E50"/>
-                </a:solidFill>
-              </a:defRPr>
-            </a:pPr>
-            <a:r>
-              <a:t>•  Typ kolizji, ruch pojazdu</a:t>
-            </a:r>
-          </a:p>
-          <a:p>
-            <a:pPr>
-              <a:spcBef>
-                <a:spcPts val="600"/>
-              </a:spcBef>
-              <a:defRPr sz="1700" b="0">
-                <a:solidFill>
-                  <a:srgbClr val="2C3E50"/>
-                </a:solidFill>
-              </a:defRPr>
-            </a:pPr>
-            <a:r>
-              <a:t>•  Limit prędkości, typ pojazdu</a:t>
-            </a:r>
-          </a:p>
-          <a:p>
-            <a:pPr>
-              <a:spcBef>
-                <a:spcPts val="600"/>
-              </a:spcBef>
-              <a:defRPr sz="1700" b="0">
-                <a:solidFill>
-                  <a:srgbClr val="2C3E50"/>
-                </a:solidFill>
-              </a:defRPr>
-            </a:pPr>
-            <a:r>
-              <a:t>•  Data, godzina, lokalizacja GPS</a:t>
-            </a:r>
-          </a:p>
-        </p:txBody>
-      </p:sp>
-      <p:sp>
-        <p:nvSpPr>
-          <p:cNvPr id="10" name="TextBox 9"/>
+              </a:spcAft>
+            </a:pPr>
+            <a:r>
+              <a:rPr sz="4000" b="1">
+                <a:solidFill>
+                  <a:srgbClr val="6C8EBF"/>
+                </a:solidFill>
+                <a:latin typeface="Calibri"/>
+              </a:rPr>
+              <a:t>3</a:t>
+            </a:r>
+          </a:p>
+        </p:txBody>
+      </p:sp>
+      <p:sp>
+        <p:nvSpPr>
+          <p:cNvPr id="11" name="TextBox 10"/>
           <p:cNvSpPr txBox="1"/>
           <p:nvPr/>
         </p:nvSpPr>
         <p:spPr>
           <a:xfrm>
-            <a:off x="6858000" y="3017520"/>
-            <a:ext cx="4572000" cy="3200400"/>
+            <a:off x="8412480" y="2057400"/>
+            <a:ext cx="2377440" cy="457200"/>
           </a:xfrm>
           <a:prstGeom prst="rect">
             <a:avLst/>
@@ -3942,75 +4430,271 @@
           </a:bodyPr>
           <a:lstStyle/>
           <a:p>
+            <a:pPr algn="ctr">
+              <a:spcAft>
+                <a:spcPts val="600"/>
+              </a:spcAft>
+            </a:pPr>
+            <a:r>
+              <a:rPr sz="1400" b="0">
+                <a:solidFill>
+                  <a:srgbClr val="595959"/>
+                </a:solidFill>
+                <a:latin typeface="Calibri"/>
+              </a:rPr>
+              <a:t>klasy targetu</a:t>
+            </a:r>
+          </a:p>
+        </p:txBody>
+      </p:sp>
+      <p:sp>
+        <p:nvSpPr>
+          <p:cNvPr id="12" name="TextBox 11"/>
+          <p:cNvSpPr txBox="1"/>
+          <p:nvPr/>
+        </p:nvSpPr>
+        <p:spPr>
+          <a:xfrm>
+            <a:off x="548640" y="2743200"/>
+            <a:ext cx="5486400" cy="457200"/>
+          </a:xfrm>
+          <a:prstGeom prst="rect">
+            <a:avLst/>
+          </a:prstGeom>
+          <a:noFill/>
+        </p:spPr>
+        <p:txBody>
+          <a:bodyPr wrap="square">
+            <a:spAutoFit/>
+          </a:bodyPr>
+          <a:lstStyle/>
+          <a:p>
             <a:pPr algn="l">
-              <a:defRPr sz="2000" b="1">
-                <a:solidFill>
-                  <a:srgbClr val="2C3E50"/>
-                </a:solidFill>
-              </a:defRPr>
-            </a:pPr>
-            <a:r>
-              <a:t>Przetwarzanie:</a:t>
-            </a:r>
-          </a:p>
+              <a:spcAft>
+                <a:spcPts val="600"/>
+              </a:spcAft>
+            </a:pPr>
+            <a:r>
+              <a:rPr sz="1800" b="1">
+                <a:solidFill>
+                  <a:srgbClr val="2B3A55"/>
+                </a:solidFill>
+                <a:latin typeface="Calibri"/>
+              </a:rPr>
+              <a:t>Ważniejsze cechy:</a:t>
+            </a:r>
+          </a:p>
+        </p:txBody>
+      </p:sp>
+      <p:sp>
+        <p:nvSpPr>
+          <p:cNvPr id="13" name="TextBox 12"/>
+          <p:cNvSpPr txBox="1"/>
+          <p:nvPr/>
+        </p:nvSpPr>
+        <p:spPr>
+          <a:xfrm>
+            <a:off x="548640" y="3200400"/>
+            <a:ext cx="5486400" cy="5120640"/>
+          </a:xfrm>
+          <a:prstGeom prst="rect">
+            <a:avLst/>
+          </a:prstGeom>
+          <a:noFill/>
+        </p:spPr>
+        <p:txBody>
+          <a:bodyPr wrap="square">
+            <a:spAutoFit/>
+          </a:bodyPr>
+          <a:lstStyle/>
           <a:p>
             <a:pPr>
-              <a:spcBef>
+              <a:spcAft>
+                <a:spcPts val="800"/>
+              </a:spcAft>
+            </a:pPr>
+            <a:r>
+              <a:rPr sz="1700">
+                <a:solidFill>
+                  <a:srgbClr val="595959"/>
+                </a:solidFill>
+                <a:latin typeface="Calibri"/>
+              </a:rPr>
+              <a:t>•  pogoda, oświetlenie, stan nawierzchni</a:t>
+            </a:r>
+          </a:p>
+          <a:p>
+            <a:pPr>
+              <a:spcAft>
+                <a:spcPts val="800"/>
+              </a:spcAft>
+            </a:pPr>
+            <a:r>
+              <a:rPr sz="1700">
+                <a:solidFill>
+                  <a:srgbClr val="595959"/>
+                </a:solidFill>
+                <a:latin typeface="Calibri"/>
+              </a:rPr>
+              <a:t>•  typ kolizji, ruch i uszkodzenia pojazdu</a:t>
+            </a:r>
+          </a:p>
+          <a:p>
+            <a:pPr>
+              <a:spcAft>
+                <a:spcPts val="800"/>
+              </a:spcAft>
+            </a:pPr>
+            <a:r>
+              <a:rPr sz="1700">
+                <a:solidFill>
+                  <a:srgbClr val="595959"/>
+                </a:solidFill>
+                <a:latin typeface="Calibri"/>
+              </a:rPr>
+              <a:t>•  limit prędkości, typ i rok pojazdu</a:t>
+            </a:r>
+          </a:p>
+          <a:p>
+            <a:pPr>
+              <a:spcAft>
+                <a:spcPts val="800"/>
+              </a:spcAft>
+            </a:pPr>
+            <a:r>
+              <a:rPr sz="1700">
+                <a:solidFill>
+                  <a:srgbClr val="595959"/>
+                </a:solidFill>
+                <a:latin typeface="Calibri"/>
+              </a:rPr>
+              <a:t>•  data i godzina zdarzenia</a:t>
+            </a:r>
+          </a:p>
+        </p:txBody>
+      </p:sp>
+      <p:sp>
+        <p:nvSpPr>
+          <p:cNvPr id="14" name="TextBox 13"/>
+          <p:cNvSpPr txBox="1"/>
+          <p:nvPr/>
+        </p:nvSpPr>
+        <p:spPr>
+          <a:xfrm>
+            <a:off x="6309360" y="2743200"/>
+            <a:ext cx="5486400" cy="457200"/>
+          </a:xfrm>
+          <a:prstGeom prst="rect">
+            <a:avLst/>
+          </a:prstGeom>
+          <a:noFill/>
+        </p:spPr>
+        <p:txBody>
+          <a:bodyPr wrap="square">
+            <a:spAutoFit/>
+          </a:bodyPr>
+          <a:lstStyle/>
+          <a:p>
+            <a:pPr algn="l">
+              <a:spcAft>
                 <a:spcPts val="600"/>
-              </a:spcBef>
-              <a:defRPr sz="1700" b="0">
-                <a:solidFill>
-                  <a:srgbClr val="2C3E50"/>
-                </a:solidFill>
-              </a:defRPr>
-            </a:pPr>
-            <a:r>
-              <a:t>•  Usunięcie kolumn z &gt;90% braków</a:t>
-            </a:r>
-          </a:p>
+              </a:spcAft>
+            </a:pPr>
+            <a:r>
+              <a:rPr sz="1800" b="1">
+                <a:solidFill>
+                  <a:srgbClr val="2B3A55"/>
+                </a:solidFill>
+                <a:latin typeface="Calibri"/>
+              </a:rPr>
+              <a:t>Preprocessing (Kedro data_preparation):</a:t>
+            </a:r>
+          </a:p>
+        </p:txBody>
+      </p:sp>
+      <p:sp>
+        <p:nvSpPr>
+          <p:cNvPr id="15" name="TextBox 14"/>
+          <p:cNvSpPr txBox="1"/>
+          <p:nvPr/>
+        </p:nvSpPr>
+        <p:spPr>
+          <a:xfrm>
+            <a:off x="6309360" y="3200400"/>
+            <a:ext cx="5486400" cy="5120640"/>
+          </a:xfrm>
+          <a:prstGeom prst="rect">
+            <a:avLst/>
+          </a:prstGeom>
+          <a:noFill/>
+        </p:spPr>
+        <p:txBody>
+          <a:bodyPr wrap="square">
+            <a:spAutoFit/>
+          </a:bodyPr>
+          <a:lstStyle/>
           <a:p>
             <a:pPr>
-              <a:spcBef>
-                <a:spcPts val="600"/>
-              </a:spcBef>
-              <a:defRPr sz="1700" b="0">
-                <a:solidFill>
-                  <a:srgbClr val="2C3E50"/>
-                </a:solidFill>
-              </a:defRPr>
-            </a:pPr>
-            <a:r>
-              <a:t>•  Imputacja medianą / modą</a:t>
+              <a:spcAft>
+                <a:spcPts val="800"/>
+              </a:spcAft>
+            </a:pPr>
+            <a:r>
+              <a:rPr sz="1700">
+                <a:solidFill>
+                  <a:srgbClr val="595959"/>
+                </a:solidFill>
+                <a:latin typeface="Calibri"/>
+              </a:rPr>
+              <a:t>•  usunięcie kolumn z dużą liczbą braków</a:t>
             </a:r>
           </a:p>
           <a:p>
             <a:pPr>
-              <a:spcBef>
-                <a:spcPts val="600"/>
-              </a:spcBef>
-              <a:defRPr sz="1700" b="0">
-                <a:solidFill>
-                  <a:srgbClr val="2C3E50"/>
-                </a:solidFill>
-              </a:defRPr>
-            </a:pPr>
-            <a:r>
-              <a:t>•  Nowe cechy: is_night, vehicle_age...</a:t>
+              <a:spcAft>
+                <a:spcPts val="800"/>
+              </a:spcAft>
+            </a:pPr>
+            <a:r>
+              <a:rPr sz="1700">
+                <a:solidFill>
+                  <a:srgbClr val="595959"/>
+                </a:solidFill>
+                <a:latin typeface="Calibri"/>
+              </a:rPr>
+              <a:t>•  imputacja: moda (tekst), mediana (liczby)</a:t>
             </a:r>
           </a:p>
           <a:p>
             <a:pPr>
-              <a:spcBef>
-                <a:spcPts val="600"/>
-              </a:spcBef>
-              <a:defRPr sz="1700" b="0">
-                <a:solidFill>
-                  <a:srgbClr val="2C3E50"/>
-                </a:solidFill>
-              </a:defRPr>
-            </a:pPr>
-            <a:r>
-              <a:t>•  Label encoding (wysoka kardynalność)</a:t>
+              <a:spcAft>
+                <a:spcPts val="800"/>
+              </a:spcAft>
+            </a:pPr>
+            <a:r>
+              <a:rPr sz="1700">
+                <a:solidFill>
+                  <a:srgbClr val="595959"/>
+                </a:solidFill>
+                <a:latin typeface="Calibri"/>
+              </a:rPr>
+              <a:t>•  cechy z daty + is_night, is_bad_weather, vehicle_age</a:t>
+            </a:r>
+          </a:p>
+          <a:p>
+            <a:pPr>
+              <a:spcAft>
+                <a:spcPts val="800"/>
+              </a:spcAft>
+            </a:pPr>
+            <a:r>
+              <a:rPr sz="1700">
+                <a:solidFill>
+                  <a:srgbClr val="595959"/>
+                </a:solidFill>
+                <a:latin typeface="Calibri"/>
+              </a:rPr>
+              <a:t>•  mapowanie targetu 5 -&gt; 3 klasy, enkodowanie tekstu</a:t>
             </a:r>
           </a:p>
         </p:txBody>
@@ -4026,14 +4710,6 @@
 <file path=ppt/slides/slide4.xml><?xml version="1.0" encoding="utf-8"?>
 <p:sld xmlns:a="http://schemas.openxmlformats.org/drawingml/2006/main" xmlns:p="http://schemas.openxmlformats.org/presentationml/2006/main" xmlns:r="http://schemas.openxmlformats.org/officeDocument/2006/relationships">
   <p:cSld>
-    <p:bg>
-      <p:bgPr>
-        <a:solidFill>
-          <a:srgbClr val="FFFFFF"/>
-        </a:solidFill>
-        <a:effectLst/>
-      </p:bgPr>
-    </p:bg>
     <p:spTree>
       <p:nvGrpSpPr>
         <p:cNvPr id="1" name=""/>
@@ -4043,14 +4719,57 @@
       <p:grpSpPr/>
       <p:sp>
         <p:nvSpPr>
-          <p:cNvPr id="2" name="TextBox 1"/>
+          <p:cNvPr id="2" name="Rectangle 1"/>
+          <p:cNvSpPr/>
+          <p:nvPr/>
+        </p:nvSpPr>
+        <p:spPr>
+          <a:xfrm>
+            <a:off x="0" y="0"/>
+            <a:ext cx="12191695" cy="868680"/>
+          </a:xfrm>
+          <a:prstGeom prst="rect">
+            <a:avLst/>
+          </a:prstGeom>
+          <a:solidFill>
+            <a:srgbClr val="2B3A55"/>
+          </a:solidFill>
+          <a:ln>
+            <a:noFill/>
+          </a:ln>
+        </p:spPr>
+        <p:style>
+          <a:lnRef idx="1">
+            <a:schemeClr val="accent1"/>
+          </a:lnRef>
+          <a:fillRef idx="3">
+            <a:schemeClr val="accent1"/>
+          </a:fillRef>
+          <a:effectRef idx="2">
+            <a:schemeClr val="accent1"/>
+          </a:effectRef>
+          <a:fontRef idx="minor">
+            <a:schemeClr val="lt1"/>
+          </a:fontRef>
+        </p:style>
+        <p:txBody>
+          <a:bodyPr rtlCol="0" anchor="ctr"/>
+          <a:lstStyle/>
+          <a:p>
+            <a:pPr algn="ctr"/>
+          </a:p>
+        </p:txBody>
+      </p:sp>
+      <p:sp>
+        <p:nvSpPr>
+          <p:cNvPr id="3" name="TextBox 2"/>
           <p:cNvSpPr txBox="1"/>
           <p:nvPr/>
         </p:nvSpPr>
         <p:spPr>
           <a:xfrm>
-            <a:off x="731520" y="365760"/>
-            <a:ext cx="7315200" cy="640080"/>
+            <a:off x="502920" y="155448"/>
+            <a:ext cx="10515600" cy="640080"/>
           </a:xfrm>
           <a:prstGeom prst="rect">
             <a:avLst/>
@@ -4064,28 +4783,32 @@
           <a:lstStyle/>
           <a:p>
             <a:pPr algn="l">
-              <a:defRPr sz="3600" b="1">
-                <a:solidFill>
-                  <a:srgbClr val="2C3E50"/>
-                </a:solidFill>
-              </a:defRPr>
-            </a:pPr>
-            <a:r>
-              <a:t>EDA — co zauważyliśmy</a:t>
-            </a:r>
-          </a:p>
-        </p:txBody>
-      </p:sp>
-      <p:sp>
-        <p:nvSpPr>
-          <p:cNvPr id="3" name="TextBox 2"/>
+              <a:spcAft>
+                <a:spcPts val="600"/>
+              </a:spcAft>
+            </a:pPr>
+            <a:r>
+              <a:rPr sz="3000" b="1">
+                <a:solidFill>
+                  <a:srgbClr val="FFFFFF"/>
+                </a:solidFill>
+                <a:latin typeface="Calibri"/>
+              </a:rPr>
+              <a:t>EDA - co zauważyliśmy</a:t>
+            </a:r>
+          </a:p>
+        </p:txBody>
+      </p:sp>
+      <p:sp>
+        <p:nvSpPr>
+          <p:cNvPr id="4" name="TextBox 3"/>
           <p:cNvSpPr txBox="1"/>
           <p:nvPr/>
         </p:nvSpPr>
         <p:spPr>
           <a:xfrm>
-            <a:off x="731520" y="1188720"/>
-            <a:ext cx="5486400" cy="4572000"/>
+            <a:off x="548640" y="1188720"/>
+            <a:ext cx="5486400" cy="457200"/>
           </a:xfrm>
           <a:prstGeom prst="rect">
             <a:avLst/>
@@ -4099,103 +4822,32 @@
           <a:lstStyle/>
           <a:p>
             <a:pPr algn="l">
-              <a:defRPr sz="2000" b="1">
-                <a:solidFill>
-                  <a:srgbClr val="2C3E50"/>
-                </a:solidFill>
-              </a:defRPr>
-            </a:pPr>
-            <a:r>
+              <a:spcAft>
+                <a:spcPts val="600"/>
+              </a:spcAft>
+            </a:pPr>
+            <a:r>
+              <a:rPr sz="1800" b="1">
+                <a:solidFill>
+                  <a:srgbClr val="2B3A55"/>
+                </a:solidFill>
+                <a:latin typeface="Calibri"/>
+              </a:rPr>
               <a:t>Główne obserwacje:</a:t>
             </a:r>
           </a:p>
-          <a:p>
-            <a:pPr>
-              <a:spcBef>
-                <a:spcPts val="600"/>
-              </a:spcBef>
-              <a:defRPr sz="1800" b="0">
-                <a:solidFill>
-                  <a:srgbClr val="2C3E50"/>
-                </a:solidFill>
-              </a:defRPr>
-            </a:pPr>
-            <a:r>
-              <a:t>•  Wypadki SERIOUS częstsze w nocy i przy złej pogodzie</a:t>
-            </a:r>
-          </a:p>
-          <a:p>
-            <a:pPr>
-              <a:spcBef>
-                <a:spcPts val="600"/>
-              </a:spcBef>
-              <a:defRPr sz="1800" b="0">
-                <a:solidFill>
-                  <a:srgbClr val="2C3E50"/>
-                </a:solidFill>
-              </a:defRPr>
-            </a:pPr>
-            <a:r>
-              <a:t>•  Wyższy limit prędkości → więcej poważnych obrażeń</a:t>
-            </a:r>
-          </a:p>
-          <a:p>
-            <a:pPr>
-              <a:spcBef>
-                <a:spcPts val="600"/>
-              </a:spcBef>
-              <a:defRPr sz="1800" b="0">
-                <a:solidFill>
-                  <a:srgbClr val="2C3E50"/>
-                </a:solidFill>
-              </a:defRPr>
-            </a:pPr>
-            <a:r>
-              <a:t>•  Kolizje czołowe — najwyższy % SERIOUS</a:t>
-            </a:r>
-          </a:p>
-          <a:p>
-            <a:pPr>
-              <a:spcBef>
-                <a:spcPts val="600"/>
-              </a:spcBef>
-              <a:defRPr sz="1800" b="0">
-                <a:solidFill>
-                  <a:srgbClr val="2C3E50"/>
-                </a:solidFill>
-              </a:defRPr>
-            </a:pPr>
-            <a:r>
-              <a:t>•  Szczyty wypadków: 7-9 i 16-18</a:t>
-            </a:r>
-          </a:p>
-          <a:p>
-            <a:pPr>
-              <a:spcBef>
-                <a:spcPts val="600"/>
-              </a:spcBef>
-              <a:defRPr sz="1800" b="0">
-                <a:solidFill>
-                  <a:srgbClr val="2C3E50"/>
-                </a:solidFill>
-              </a:defRPr>
-            </a:pPr>
-            <a:r>
-              <a:t>•  Piątki — najwięcej wypadków</a:t>
-            </a:r>
-          </a:p>
-        </p:txBody>
-      </p:sp>
-      <p:sp>
-        <p:nvSpPr>
-          <p:cNvPr id="4" name="TextBox 3"/>
+        </p:txBody>
+      </p:sp>
+      <p:sp>
+        <p:nvSpPr>
+          <p:cNvPr id="5" name="TextBox 4"/>
           <p:cNvSpPr txBox="1"/>
           <p:nvPr/>
         </p:nvSpPr>
         <p:spPr>
           <a:xfrm>
-            <a:off x="6858000" y="1188720"/>
-            <a:ext cx="4572000" cy="4572000"/>
+            <a:off x="548640" y="1645920"/>
+            <a:ext cx="5486400" cy="5120640"/>
           </a:xfrm>
           <a:prstGeom prst="rect">
             <a:avLst/>
@@ -4208,113 +4860,248 @@
           </a:bodyPr>
           <a:lstStyle/>
           <a:p>
+            <a:pPr>
+              <a:spcAft>
+                <a:spcPts val="800"/>
+              </a:spcAft>
+            </a:pPr>
+            <a:r>
+              <a:rPr sz="1700">
+                <a:solidFill>
+                  <a:srgbClr val="595959"/>
+                </a:solidFill>
+                <a:latin typeface="Calibri"/>
+              </a:rPr>
+              <a:t>•  wypadki SERIOUS częstsze w nocy i przy złej pogodzie</a:t>
+            </a:r>
+          </a:p>
+          <a:p>
+            <a:pPr>
+              <a:spcAft>
+                <a:spcPts val="800"/>
+              </a:spcAft>
+            </a:pPr>
+            <a:r>
+              <a:rPr sz="1700">
+                <a:solidFill>
+                  <a:srgbClr val="595959"/>
+                </a:solidFill>
+                <a:latin typeface="Calibri"/>
+              </a:rPr>
+              <a:t>•  wyższy limit prędkości to więcej poważnych obrażeń</a:t>
+            </a:r>
+          </a:p>
+          <a:p>
+            <a:pPr>
+              <a:spcAft>
+                <a:spcPts val="800"/>
+              </a:spcAft>
+            </a:pPr>
+            <a:r>
+              <a:rPr sz="1700">
+                <a:solidFill>
+                  <a:srgbClr val="595959"/>
+                </a:solidFill>
+                <a:latin typeface="Calibri"/>
+              </a:rPr>
+              <a:t>•  kolizje czołowe (HEAD ON) najgroźniejsze</a:t>
+            </a:r>
+          </a:p>
+          <a:p>
+            <a:pPr>
+              <a:spcAft>
+                <a:spcPts val="800"/>
+              </a:spcAft>
+            </a:pPr>
+            <a:r>
+              <a:rPr sz="1700">
+                <a:solidFill>
+                  <a:srgbClr val="595959"/>
+                </a:solidFill>
+                <a:latin typeface="Calibri"/>
+              </a:rPr>
+              <a:t>•  szczyty wypadków w godzinach dojazdów do pracy</a:t>
+            </a:r>
+          </a:p>
+        </p:txBody>
+      </p:sp>
+      <p:sp>
+        <p:nvSpPr>
+          <p:cNvPr id="6" name="TextBox 5"/>
+          <p:cNvSpPr txBox="1"/>
+          <p:nvPr/>
+        </p:nvSpPr>
+        <p:spPr>
+          <a:xfrm>
+            <a:off x="6309360" y="1188720"/>
+            <a:ext cx="5486400" cy="457200"/>
+          </a:xfrm>
+          <a:prstGeom prst="rect">
+            <a:avLst/>
+          </a:prstGeom>
+          <a:noFill/>
+        </p:spPr>
+        <p:txBody>
+          <a:bodyPr wrap="square">
+            <a:spAutoFit/>
+          </a:bodyPr>
+          <a:lstStyle/>
+          <a:p>
             <a:pPr algn="l">
-              <a:defRPr sz="2000" b="1">
-                <a:solidFill>
-                  <a:srgbClr val="2C3E50"/>
-                </a:solidFill>
-              </a:defRPr>
-            </a:pPr>
-            <a:r>
-              <a:t>Top cechy (wg Random Forest):</a:t>
-            </a:r>
-          </a:p>
+              <a:spcAft>
+                <a:spcPts val="600"/>
+              </a:spcAft>
+            </a:pPr>
+            <a:r>
+              <a:rPr sz="1800" b="1">
+                <a:solidFill>
+                  <a:srgbClr val="2B3A55"/>
+                </a:solidFill>
+                <a:latin typeface="Calibri"/>
+              </a:rPr>
+              <a:t>Najważniejsze cechy (wg Random Forest):</a:t>
+            </a:r>
+          </a:p>
+        </p:txBody>
+      </p:sp>
+      <p:sp>
+        <p:nvSpPr>
+          <p:cNvPr id="7" name="TextBox 6"/>
+          <p:cNvSpPr txBox="1"/>
+          <p:nvPr/>
+        </p:nvSpPr>
+        <p:spPr>
+          <a:xfrm>
+            <a:off x="6309360" y="1645920"/>
+            <a:ext cx="5486400" cy="5120640"/>
+          </a:xfrm>
+          <a:prstGeom prst="rect">
+            <a:avLst/>
+          </a:prstGeom>
+          <a:noFill/>
+        </p:spPr>
+        <p:txBody>
+          <a:bodyPr wrap="square">
+            <a:spAutoFit/>
+          </a:bodyPr>
+          <a:lstStyle/>
           <a:p>
             <a:pPr>
-              <a:spcBef>
+              <a:spcAft>
+                <a:spcPts val="800"/>
+              </a:spcAft>
+            </a:pPr>
+            <a:r>
+              <a:rPr sz="1700">
+                <a:solidFill>
+                  <a:srgbClr val="595959"/>
+                </a:solidFill>
+                <a:latin typeface="Calibri"/>
+              </a:rPr>
+              <a:t>•  Vehicle Damage Extent</a:t>
+            </a:r>
+          </a:p>
+          <a:p>
+            <a:pPr>
+              <a:spcAft>
+                <a:spcPts val="800"/>
+              </a:spcAft>
+            </a:pPr>
+            <a:r>
+              <a:rPr sz="1700">
+                <a:solidFill>
+                  <a:srgbClr val="595959"/>
+                </a:solidFill>
+                <a:latin typeface="Calibri"/>
+              </a:rPr>
+              <a:t>•  Collision Type</a:t>
+            </a:r>
+          </a:p>
+          <a:p>
+            <a:pPr>
+              <a:spcAft>
+                <a:spcPts val="800"/>
+              </a:spcAft>
+            </a:pPr>
+            <a:r>
+              <a:rPr sz="1700">
+                <a:solidFill>
+                  <a:srgbClr val="595959"/>
+                </a:solidFill>
+                <a:latin typeface="Calibri"/>
+              </a:rPr>
+              <a:t>•  Speed Limit</a:t>
+            </a:r>
+          </a:p>
+          <a:p>
+            <a:pPr>
+              <a:spcAft>
+                <a:spcPts val="800"/>
+              </a:spcAft>
+            </a:pPr>
+            <a:r>
+              <a:rPr sz="1700">
+                <a:solidFill>
+                  <a:srgbClr val="595959"/>
+                </a:solidFill>
+                <a:latin typeface="Calibri"/>
+              </a:rPr>
+              <a:t>•  Vehicle Movement</a:t>
+            </a:r>
+          </a:p>
+          <a:p>
+            <a:pPr>
+              <a:spcAft>
+                <a:spcPts val="800"/>
+              </a:spcAft>
+            </a:pPr>
+            <a:r>
+              <a:rPr sz="1700">
+                <a:solidFill>
+                  <a:srgbClr val="595959"/>
+                </a:solidFill>
+                <a:latin typeface="Calibri"/>
+              </a:rPr>
+              <a:t>•  crash_hour</a:t>
+            </a:r>
+          </a:p>
+        </p:txBody>
+      </p:sp>
+      <p:sp>
+        <p:nvSpPr>
+          <p:cNvPr id="8" name="TextBox 7"/>
+          <p:cNvSpPr txBox="1"/>
+          <p:nvPr/>
+        </p:nvSpPr>
+        <p:spPr>
+          <a:xfrm>
+            <a:off x="548640" y="5394960"/>
+            <a:ext cx="10972800" cy="731520"/>
+          </a:xfrm>
+          <a:prstGeom prst="rect">
+            <a:avLst/>
+          </a:prstGeom>
+          <a:noFill/>
+        </p:spPr>
+        <p:txBody>
+          <a:bodyPr wrap="square">
+            <a:spAutoFit/>
+          </a:bodyPr>
+          <a:lstStyle/>
+          <a:p>
+            <a:pPr algn="l">
+              <a:spcAft>
                 <a:spcPts val="600"/>
-              </a:spcBef>
-              <a:defRPr sz="1800" b="0">
-                <a:solidFill>
-                  <a:srgbClr val="2C3E50"/>
-                </a:solidFill>
-              </a:defRPr>
-            </a:pPr>
-            <a:r>
-              <a:t>1.  Vehicle Damage Extent</a:t>
-            </a:r>
-          </a:p>
-          <a:p>
-            <a:pPr>
-              <a:spcBef>
-                <a:spcPts val="600"/>
-              </a:spcBef>
-              <a:defRPr sz="1800" b="0">
-                <a:solidFill>
-                  <a:srgbClr val="2C3E50"/>
-                </a:solidFill>
-              </a:defRPr>
-            </a:pPr>
-            <a:r>
-              <a:t>2.  Collision Type</a:t>
-            </a:r>
-          </a:p>
-          <a:p>
-            <a:pPr>
-              <a:spcBef>
-                <a:spcPts val="600"/>
-              </a:spcBef>
-              <a:defRPr sz="1800" b="0">
-                <a:solidFill>
-                  <a:srgbClr val="2C3E50"/>
-                </a:solidFill>
-              </a:defRPr>
-            </a:pPr>
-            <a:r>
-              <a:t>3.  Speed Limit</a:t>
-            </a:r>
-          </a:p>
-          <a:p>
-            <a:pPr>
-              <a:spcBef>
-                <a:spcPts val="600"/>
-              </a:spcBef>
-              <a:defRPr sz="1800" b="0">
-                <a:solidFill>
-                  <a:srgbClr val="2C3E50"/>
-                </a:solidFill>
-              </a:defRPr>
-            </a:pPr>
-            <a:r>
-              <a:t>4.  Vehicle Movement</a:t>
-            </a:r>
-          </a:p>
-          <a:p>
-            <a:pPr>
-              <a:spcBef>
-                <a:spcPts val="600"/>
-              </a:spcBef>
-              <a:defRPr sz="1800" b="0">
-                <a:solidFill>
-                  <a:srgbClr val="2C3E50"/>
-                </a:solidFill>
-              </a:defRPr>
-            </a:pPr>
-            <a:r>
-              <a:t>5.  Crash hour</a:t>
-            </a:r>
-          </a:p>
-          <a:p>
-            <a:pPr>
-              <a:spcBef>
-                <a:spcPts val="600"/>
-              </a:spcBef>
-              <a:defRPr sz="1000" b="0"/>
-            </a:pPr>
-          </a:p>
-          <a:p>
-            <a:pPr>
-              <a:spcBef>
-                <a:spcPts val="600"/>
-              </a:spcBef>
-              <a:defRPr sz="1400" b="0">
-                <a:solidFill>
-                  <a:srgbClr val="7F8C8D"/>
-                </a:solidFill>
-              </a:defRPr>
-            </a:pPr>
-            <a:r>
-              <a:t>Szczegóły: notebooks/01_baseline_model.ipynb</a:t>
+              </a:spcAft>
+            </a:pPr>
+            <a:r>
+              <a:rPr sz="1500" b="0">
+                <a:solidFill>
+                  <a:srgbClr val="595959"/>
+                </a:solidFill>
+                <a:latin typeface="Calibri"/>
+              </a:rPr>
+              <a:t>Pełne EDA w notebooks/01_baseline_model.ipynb (wykresy rozkładów, mapa wypadków, korelacje).</a:t>
             </a:r>
           </a:p>
         </p:txBody>
@@ -4330,14 +5117,6 @@
 <file path=ppt/slides/slide5.xml><?xml version="1.0" encoding="utf-8"?>
 <p:sld xmlns:a="http://schemas.openxmlformats.org/drawingml/2006/main" xmlns:p="http://schemas.openxmlformats.org/presentationml/2006/main" xmlns:r="http://schemas.openxmlformats.org/officeDocument/2006/relationships">
   <p:cSld>
-    <p:bg>
-      <p:bgPr>
-        <a:solidFill>
-          <a:srgbClr val="FFFFFF"/>
-        </a:solidFill>
-        <a:effectLst/>
-      </p:bgPr>
-    </p:bg>
     <p:spTree>
       <p:nvGrpSpPr>
         <p:cNvPr id="1" name=""/>
@@ -4347,14 +5126,57 @@
       <p:grpSpPr/>
       <p:sp>
         <p:nvSpPr>
-          <p:cNvPr id="2" name="TextBox 1"/>
+          <p:cNvPr id="2" name="Rectangle 1"/>
+          <p:cNvSpPr/>
+          <p:nvPr/>
+        </p:nvSpPr>
+        <p:spPr>
+          <a:xfrm>
+            <a:off x="0" y="0"/>
+            <a:ext cx="12191695" cy="868680"/>
+          </a:xfrm>
+          <a:prstGeom prst="rect">
+            <a:avLst/>
+          </a:prstGeom>
+          <a:solidFill>
+            <a:srgbClr val="2B3A55"/>
+          </a:solidFill>
+          <a:ln>
+            <a:noFill/>
+          </a:ln>
+        </p:spPr>
+        <p:style>
+          <a:lnRef idx="1">
+            <a:schemeClr val="accent1"/>
+          </a:lnRef>
+          <a:fillRef idx="3">
+            <a:schemeClr val="accent1"/>
+          </a:fillRef>
+          <a:effectRef idx="2">
+            <a:schemeClr val="accent1"/>
+          </a:effectRef>
+          <a:fontRef idx="minor">
+            <a:schemeClr val="lt1"/>
+          </a:fontRef>
+        </p:style>
+        <p:txBody>
+          <a:bodyPr rtlCol="0" anchor="ctr"/>
+          <a:lstStyle/>
+          <a:p>
+            <a:pPr algn="ctr"/>
+          </a:p>
+        </p:txBody>
+      </p:sp>
+      <p:sp>
+        <p:nvSpPr>
+          <p:cNvPr id="3" name="TextBox 2"/>
           <p:cNvSpPr txBox="1"/>
           <p:nvPr/>
         </p:nvSpPr>
         <p:spPr>
           <a:xfrm>
-            <a:off x="731520" y="365760"/>
-            <a:ext cx="7315200" cy="640080"/>
+            <a:off x="502920" y="155448"/>
+            <a:ext cx="10515600" cy="640080"/>
           </a:xfrm>
           <a:prstGeom prst="rect">
             <a:avLst/>
@@ -4368,28 +5190,56 @@
           <a:lstStyle/>
           <a:p>
             <a:pPr algn="l">
-              <a:defRPr sz="3600" b="1">
-                <a:solidFill>
-                  <a:srgbClr val="2C3E50"/>
-                </a:solidFill>
-              </a:defRPr>
-            </a:pPr>
-            <a:r>
-              <a:t>Pipeline ML (Kedro)</a:t>
-            </a:r>
-          </a:p>
-        </p:txBody>
-      </p:sp>
-      <p:sp>
-        <p:nvSpPr>
-          <p:cNvPr id="3" name="TextBox 2"/>
+              <a:spcAft>
+                <a:spcPts val="600"/>
+              </a:spcAft>
+            </a:pPr>
+            <a:r>
+              <a:rPr sz="3000" b="1">
+                <a:solidFill>
+                  <a:srgbClr val="FFFFFF"/>
+                </a:solidFill>
+                <a:latin typeface="Calibri"/>
+              </a:rPr>
+              <a:t>Architektura</a:t>
+            </a:r>
+          </a:p>
+        </p:txBody>
+      </p:sp>
+      <p:pic>
+        <p:nvPicPr>
+          <p:cNvPr id="4" name="Picture 3" descr="architecture.png"/>
+          <p:cNvPicPr>
+            <a:picLocks noChangeAspect="1"/>
+          </p:cNvPicPr>
+          <p:nvPr/>
+        </p:nvPicPr>
+        <p:blipFill>
+          <a:blip r:embed="rId2"/>
+          <a:stretch>
+            <a:fillRect/>
+          </a:stretch>
+        </p:blipFill>
+        <p:spPr>
+          <a:xfrm>
+            <a:off x="640080" y="1143000"/>
+            <a:ext cx="10972800" cy="4446872"/>
+          </a:xfrm>
+          <a:prstGeom prst="rect">
+            <a:avLst/>
+          </a:prstGeom>
+        </p:spPr>
+      </p:pic>
+      <p:sp>
+        <p:nvSpPr>
+          <p:cNvPr id="5" name="TextBox 4"/>
           <p:cNvSpPr txBox="1"/>
           <p:nvPr/>
         </p:nvSpPr>
         <p:spPr>
           <a:xfrm>
-            <a:off x="1371600" y="1371600"/>
-            <a:ext cx="9144000" cy="4114800"/>
+            <a:off x="640080" y="6126480"/>
+            <a:ext cx="10972800" cy="457200"/>
           </a:xfrm>
           <a:prstGeom prst="rect">
             <a:avLst/>
@@ -4403,89 +5253,18 @@
           <a:lstStyle/>
           <a:p>
             <a:pPr algn="l">
-              <a:defRPr sz="2000" b="0">
-                <a:solidFill>
-                  <a:srgbClr val="2C3E50"/>
-                </a:solidFill>
-              </a:defRPr>
-            </a:pPr>
-            <a:r>
-              <a:t>crash_data.csv</a:t>
-            </a:r>
-            <a:br/>
-            <a:r>
-              <a:t>      ↓</a:t>
-            </a:r>
-            <a:br/>
-            <a:r>
-              <a:t>[data_preparation] — 5 węzłów</a:t>
-            </a:r>
-            <a:br/>
-            <a:r>
-              <a:t>  usunięcie kolumn → imputacja → inżynieria cech</a:t>
-            </a:r>
-            <a:br/>
-            <a:r>
-              <a:t>  → mapowanie target → enkodowanie</a:t>
-            </a:r>
-            <a:br/>
-            <a:r>
-              <a:t>      ↓</a:t>
-            </a:r>
-            <a:br/>
-            <a:r>
-              <a:t>[data_modeling] — 3 węzły</a:t>
-            </a:r>
-            <a:br/>
-            <a:r>
-              <a:t>  podział train/test → trening → ewaluacja</a:t>
-            </a:r>
-            <a:br/>
-            <a:r>
-              <a:t>      ↓</a:t>
-            </a:r>
-            <a:br/>
-            <a:r>
-              <a:t>[tuning]</a:t>
-            </a:r>
-            <a:br/>
-            <a:r>
-              <a:t>  porównanie 4 modeli + Optuna (50 prób)</a:t>
-            </a:r>
-          </a:p>
-        </p:txBody>
-      </p:sp>
-      <p:sp>
-        <p:nvSpPr>
-          <p:cNvPr id="4" name="TextBox 3"/>
-          <p:cNvSpPr txBox="1"/>
-          <p:nvPr/>
-        </p:nvSpPr>
-        <p:spPr>
-          <a:xfrm>
-            <a:off x="731520" y="5669280"/>
-            <a:ext cx="9144000" cy="457200"/>
-          </a:xfrm>
-          <a:prstGeom prst="rect">
-            <a:avLst/>
-          </a:prstGeom>
-          <a:noFill/>
-        </p:spPr>
-        <p:txBody>
-          <a:bodyPr wrap="square">
-            <a:spAutoFit/>
-          </a:bodyPr>
-          <a:lstStyle/>
-          <a:p>
-            <a:pPr algn="l">
-              <a:defRPr sz="1600" b="0">
-                <a:solidFill>
-                  <a:srgbClr val="7F8C8D"/>
-                </a:solidFill>
-              </a:defRPr>
-            </a:pPr>
-            <a:r>
-              <a:t>Uruchomienie:  kedro run  |  kedro run --pipeline=tuning  |  kedro viz</a:t>
+              <a:spcAft>
+                <a:spcPts val="600"/>
+              </a:spcAft>
+            </a:pPr>
+            <a:r>
+              <a:rPr sz="1500" b="0">
+                <a:solidFill>
+                  <a:srgbClr val="595959"/>
+                </a:solidFill>
+                <a:latin typeface="Calibri"/>
+              </a:rPr>
+              <a:t>Trzy warstwy: dane (Kedro), modelowanie (sklearn / Optuna / AutoGluon + MLflow), aplikacja (FastAPI + Streamlit).</a:t>
             </a:r>
           </a:p>
         </p:txBody>
@@ -4501,14 +5280,6 @@
 <file path=ppt/slides/slide6.xml><?xml version="1.0" encoding="utf-8"?>
 <p:sld xmlns:a="http://schemas.openxmlformats.org/drawingml/2006/main" xmlns:p="http://schemas.openxmlformats.org/presentationml/2006/main" xmlns:r="http://schemas.openxmlformats.org/officeDocument/2006/relationships">
   <p:cSld>
-    <p:bg>
-      <p:bgPr>
-        <a:solidFill>
-          <a:srgbClr val="FFFFFF"/>
-        </a:solidFill>
-        <a:effectLst/>
-      </p:bgPr>
-    </p:bg>
     <p:spTree>
       <p:nvGrpSpPr>
         <p:cNvPr id="1" name=""/>
@@ -4518,14 +5289,57 @@
       <p:grpSpPr/>
       <p:sp>
         <p:nvSpPr>
-          <p:cNvPr id="2" name="TextBox 1"/>
+          <p:cNvPr id="2" name="Rectangle 1"/>
+          <p:cNvSpPr/>
+          <p:nvPr/>
+        </p:nvSpPr>
+        <p:spPr>
+          <a:xfrm>
+            <a:off x="0" y="0"/>
+            <a:ext cx="12191695" cy="868680"/>
+          </a:xfrm>
+          <a:prstGeom prst="rect">
+            <a:avLst/>
+          </a:prstGeom>
+          <a:solidFill>
+            <a:srgbClr val="2B3A55"/>
+          </a:solidFill>
+          <a:ln>
+            <a:noFill/>
+          </a:ln>
+        </p:spPr>
+        <p:style>
+          <a:lnRef idx="1">
+            <a:schemeClr val="accent1"/>
+          </a:lnRef>
+          <a:fillRef idx="3">
+            <a:schemeClr val="accent1"/>
+          </a:fillRef>
+          <a:effectRef idx="2">
+            <a:schemeClr val="accent1"/>
+          </a:effectRef>
+          <a:fontRef idx="minor">
+            <a:schemeClr val="lt1"/>
+          </a:fontRef>
+        </p:style>
+        <p:txBody>
+          <a:bodyPr rtlCol="0" anchor="ctr"/>
+          <a:lstStyle/>
+          <a:p>
+            <a:pPr algn="ctr"/>
+          </a:p>
+        </p:txBody>
+      </p:sp>
+      <p:sp>
+        <p:nvSpPr>
+          <p:cNvPr id="3" name="TextBox 2"/>
           <p:cNvSpPr txBox="1"/>
           <p:nvPr/>
         </p:nvSpPr>
         <p:spPr>
           <a:xfrm>
-            <a:off x="731520" y="365760"/>
-            <a:ext cx="7315200" cy="640080"/>
+            <a:off x="502920" y="155448"/>
+            <a:ext cx="10515600" cy="640080"/>
           </a:xfrm>
           <a:prstGeom prst="rect">
             <a:avLst/>
@@ -4539,404 +5353,22 @@
           <a:lstStyle/>
           <a:p>
             <a:pPr algn="l">
-              <a:defRPr sz="3600" b="1">
-                <a:solidFill>
-                  <a:srgbClr val="2C3E50"/>
-                </a:solidFill>
-              </a:defRPr>
-            </a:pPr>
-            <a:r>
-              <a:t>Wyniki modeli</a:t>
-            </a:r>
-          </a:p>
-        </p:txBody>
-      </p:sp>
-      <p:graphicFrame>
-        <p:nvGraphicFramePr>
-          <p:cNvPr id="3" name="Table 2"/>
-          <p:cNvGraphicFramePr>
-            <a:graphicFrameLocks noGrp="1"/>
-          </p:cNvGraphicFramePr>
-          <p:nvPr/>
-        </p:nvGraphicFramePr>
-        <p:xfrm>
-          <a:off x="914400" y="1280160"/>
-          <a:ext cx="10058400" cy="2560320"/>
-        </p:xfrm>
-        <a:graphic>
-          <a:graphicData uri="http://schemas.openxmlformats.org/drawingml/2006/table">
-            <a:tbl>
-              <a:tblPr firstRow="1" bandRow="1">
-                <a:tableStyleId>{5C22544A-7EE6-4342-B048-85BDC9FD1C3A}</a:tableStyleId>
-              </a:tblPr>
-              <a:tblGrid>
-                <a:gridCol w="2514600"/>
-                <a:gridCol w="2514600"/>
-                <a:gridCol w="2514600"/>
-                <a:gridCol w="2514600"/>
-              </a:tblGrid>
-              <a:tr h="512064">
-                <a:tc>
-                  <a:txBody>
-                    <a:bodyPr/>
-                    <a:lstStyle/>
-                    <a:p>
-                      <a:pPr>
-                        <a:defRPr sz="1600" b="1">
-                          <a:solidFill>
-                            <a:srgbClr val="FFFFFF"/>
-                          </a:solidFill>
-                        </a:defRPr>
-                      </a:pPr>
-                      <a:r>
-                        <a:t>Model</a:t>
-                      </a:r>
-                    </a:p>
-                  </a:txBody>
-                  <a:tcPr>
-                    <a:solidFill>
-                      <a:srgbClr val="3498DB"/>
-                    </a:solidFill>
-                  </a:tcPr>
-                </a:tc>
-                <a:tc>
-                  <a:txBody>
-                    <a:bodyPr/>
-                    <a:lstStyle/>
-                    <a:p>
-                      <a:pPr>
-                        <a:defRPr sz="1600" b="1">
-                          <a:solidFill>
-                            <a:srgbClr val="FFFFFF"/>
-                          </a:solidFill>
-                        </a:defRPr>
-                      </a:pPr>
-                      <a:r>
-                        <a:t>Dokładność</a:t>
-                      </a:r>
-                    </a:p>
-                  </a:txBody>
-                  <a:tcPr>
-                    <a:solidFill>
-                      <a:srgbClr val="3498DB"/>
-                    </a:solidFill>
-                  </a:tcPr>
-                </a:tc>
-                <a:tc>
-                  <a:txBody>
-                    <a:bodyPr/>
-                    <a:lstStyle/>
-                    <a:p>
-                      <a:pPr>
-                        <a:defRPr sz="1600" b="1">
-                          <a:solidFill>
-                            <a:srgbClr val="FFFFFF"/>
-                          </a:solidFill>
-                        </a:defRPr>
-                      </a:pPr>
-                      <a:r>
-                        <a:t>F1 ważone</a:t>
-                      </a:r>
-                    </a:p>
-                  </a:txBody>
-                  <a:tcPr>
-                    <a:solidFill>
-                      <a:srgbClr val="3498DB"/>
-                    </a:solidFill>
-                  </a:tcPr>
-                </a:tc>
-                <a:tc>
-                  <a:txBody>
-                    <a:bodyPr/>
-                    <a:lstStyle/>
-                    <a:p>
-                      <a:pPr>
-                        <a:defRPr sz="1600" b="1">
-                          <a:solidFill>
-                            <a:srgbClr val="FFFFFF"/>
-                          </a:solidFill>
-                        </a:defRPr>
-                      </a:pPr>
-                      <a:r>
-                        <a:t>F1 makro</a:t>
-                      </a:r>
-                    </a:p>
-                  </a:txBody>
-                  <a:tcPr>
-                    <a:solidFill>
-                      <a:srgbClr val="3498DB"/>
-                    </a:solidFill>
-                  </a:tcPr>
-                </a:tc>
-              </a:tr>
-              <a:tr h="512064">
-                <a:tc>
-                  <a:txBody>
-                    <a:bodyPr/>
-                    <a:lstStyle/>
-                    <a:p>
-                      <a:pPr>
-                        <a:defRPr sz="1500" b="1"/>
-                      </a:pPr>
-                      <a:r>
-                        <a:t>Optuna LightGBM</a:t>
-                      </a:r>
-                    </a:p>
-                  </a:txBody>
-                  <a:tcPr>
-                    <a:solidFill>
-                      <a:srgbClr val="D4EFDF"/>
-                    </a:solidFill>
-                  </a:tcPr>
-                </a:tc>
-                <a:tc>
-                  <a:txBody>
-                    <a:bodyPr/>
-                    <a:lstStyle/>
-                    <a:p>
-                      <a:pPr>
-                        <a:defRPr sz="1500" b="1"/>
-                      </a:pPr>
-                      <a:r>
-                        <a:t>0.78</a:t>
-                      </a:r>
-                    </a:p>
-                  </a:txBody>
-                  <a:tcPr>
-                    <a:solidFill>
-                      <a:srgbClr val="D4EFDF"/>
-                    </a:solidFill>
-                  </a:tcPr>
-                </a:tc>
-                <a:tc>
-                  <a:txBody>
-                    <a:bodyPr/>
-                    <a:lstStyle/>
-                    <a:p>
-                      <a:pPr>
-                        <a:defRPr sz="1500" b="1"/>
-                      </a:pPr>
-                      <a:r>
-                        <a:t>0.78</a:t>
-                      </a:r>
-                    </a:p>
-                  </a:txBody>
-                  <a:tcPr>
-                    <a:solidFill>
-                      <a:srgbClr val="D4EFDF"/>
-                    </a:solidFill>
-                  </a:tcPr>
-                </a:tc>
-                <a:tc>
-                  <a:txBody>
-                    <a:bodyPr/>
-                    <a:lstStyle/>
-                    <a:p>
-                      <a:pPr>
-                        <a:defRPr sz="1500" b="1"/>
-                      </a:pPr>
-                      <a:r>
-                        <a:t>0.46</a:t>
-                      </a:r>
-                    </a:p>
-                  </a:txBody>
-                  <a:tcPr>
-                    <a:solidFill>
-                      <a:srgbClr val="D4EFDF"/>
-                    </a:solidFill>
-                  </a:tcPr>
-                </a:tc>
-              </a:tr>
-              <a:tr h="512064">
-                <a:tc>
-                  <a:txBody>
-                    <a:bodyPr/>
-                    <a:lstStyle/>
-                    <a:p>
-                      <a:pPr>
-                        <a:defRPr sz="1500"/>
-                      </a:pPr>
-                      <a:r>
-                        <a:t>XGBoost</a:t>
-                      </a:r>
-                    </a:p>
-                  </a:txBody>
-                  <a:tcPr/>
-                </a:tc>
-                <a:tc>
-                  <a:txBody>
-                    <a:bodyPr/>
-                    <a:lstStyle/>
-                    <a:p>
-                      <a:pPr>
-                        <a:defRPr sz="1500"/>
-                      </a:pPr>
-                      <a:r>
-                        <a:t>0.83</a:t>
-                      </a:r>
-                    </a:p>
-                  </a:txBody>
-                  <a:tcPr/>
-                </a:tc>
-                <a:tc>
-                  <a:txBody>
-                    <a:bodyPr/>
-                    <a:lstStyle/>
-                    <a:p>
-                      <a:pPr>
-                        <a:defRPr sz="1500"/>
-                      </a:pPr>
-                      <a:r>
-                        <a:t>0.77</a:t>
-                      </a:r>
-                    </a:p>
-                  </a:txBody>
-                  <a:tcPr/>
-                </a:tc>
-                <a:tc>
-                  <a:txBody>
-                    <a:bodyPr/>
-                    <a:lstStyle/>
-                    <a:p>
-                      <a:pPr>
-                        <a:defRPr sz="1500"/>
-                      </a:pPr>
-                      <a:r>
-                        <a:t>0.40</a:t>
-                      </a:r>
-                    </a:p>
-                  </a:txBody>
-                  <a:tcPr/>
-                </a:tc>
-              </a:tr>
-              <a:tr h="512064">
-                <a:tc>
-                  <a:txBody>
-                    <a:bodyPr/>
-                    <a:lstStyle/>
-                    <a:p>
-                      <a:pPr>
-                        <a:defRPr sz="1500"/>
-                      </a:pPr>
-                      <a:r>
-                        <a:t>Gradient Boosting</a:t>
-                      </a:r>
-                    </a:p>
-                  </a:txBody>
-                  <a:tcPr/>
-                </a:tc>
-                <a:tc>
-                  <a:txBody>
-                    <a:bodyPr/>
-                    <a:lstStyle/>
-                    <a:p>
-                      <a:pPr>
-                        <a:defRPr sz="1500"/>
-                      </a:pPr>
-                      <a:r>
-                        <a:t>0.82</a:t>
-                      </a:r>
-                    </a:p>
-                  </a:txBody>
-                  <a:tcPr/>
-                </a:tc>
-                <a:tc>
-                  <a:txBody>
-                    <a:bodyPr/>
-                    <a:lstStyle/>
-                    <a:p>
-                      <a:pPr>
-                        <a:defRPr sz="1500"/>
-                      </a:pPr>
-                      <a:r>
-                        <a:t>0.77</a:t>
-                      </a:r>
-                    </a:p>
-                  </a:txBody>
-                  <a:tcPr/>
-                </a:tc>
-                <a:tc>
-                  <a:txBody>
-                    <a:bodyPr/>
-                    <a:lstStyle/>
-                    <a:p>
-                      <a:pPr>
-                        <a:defRPr sz="1500"/>
-                      </a:pPr>
-                      <a:r>
-                        <a:t>0.40</a:t>
-                      </a:r>
-                    </a:p>
-                  </a:txBody>
-                  <a:tcPr/>
-                </a:tc>
-              </a:tr>
-              <a:tr h="512064">
-                <a:tc>
-                  <a:txBody>
-                    <a:bodyPr/>
-                    <a:lstStyle/>
-                    <a:p>
-                      <a:pPr>
-                        <a:defRPr sz="1500"/>
-                      </a:pPr>
-                      <a:r>
-                        <a:t>Random Forest (baseline)</a:t>
-                      </a:r>
-                    </a:p>
-                  </a:txBody>
-                  <a:tcPr/>
-                </a:tc>
-                <a:tc>
-                  <a:txBody>
-                    <a:bodyPr/>
-                    <a:lstStyle/>
-                    <a:p>
-                      <a:pPr>
-                        <a:defRPr sz="1500"/>
-                      </a:pPr>
-                      <a:r>
-                        <a:t>0.82</a:t>
-                      </a:r>
-                    </a:p>
-                  </a:txBody>
-                  <a:tcPr/>
-                </a:tc>
-                <a:tc>
-                  <a:txBody>
-                    <a:bodyPr/>
-                    <a:lstStyle/>
-                    <a:p>
-                      <a:pPr>
-                        <a:defRPr sz="1500"/>
-                      </a:pPr>
-                      <a:r>
-                        <a:t>0.75</a:t>
-                      </a:r>
-                    </a:p>
-                  </a:txBody>
-                  <a:tcPr/>
-                </a:tc>
-                <a:tc>
-                  <a:txBody>
-                    <a:bodyPr/>
-                    <a:lstStyle/>
-                    <a:p>
-                      <a:pPr>
-                        <a:defRPr sz="1500"/>
-                      </a:pPr>
-                      <a:r>
-                        <a:t>0.33</a:t>
-                      </a:r>
-                    </a:p>
-                  </a:txBody>
-                  <a:tcPr/>
-                </a:tc>
-              </a:tr>
-            </a:tbl>
-          </a:graphicData>
-        </a:graphic>
-      </p:graphicFrame>
+              <a:spcAft>
+                <a:spcPts val="600"/>
+              </a:spcAft>
+            </a:pPr>
+            <a:r>
+              <a:rPr sz="3000" b="1">
+                <a:solidFill>
+                  <a:srgbClr val="FFFFFF"/>
+                </a:solidFill>
+                <a:latin typeface="Calibri"/>
+              </a:rPr>
+              <a:t>Pipeline ML (Kedro)</a:t>
+            </a:r>
+          </a:p>
+        </p:txBody>
+      </p:sp>
       <p:sp>
         <p:nvSpPr>
           <p:cNvPr id="4" name="TextBox 3"/>
@@ -4945,8 +5377,8 @@
         </p:nvSpPr>
         <p:spPr>
           <a:xfrm>
-            <a:off x="731520" y="4114800"/>
-            <a:ext cx="10058400" cy="1371600"/>
+            <a:off x="548640" y="1280160"/>
+            <a:ext cx="5669280" cy="5120640"/>
           </a:xfrm>
           <a:prstGeom prst="rect">
             <a:avLst/>
@@ -4959,45 +5391,286 @@
           </a:bodyPr>
           <a:lstStyle/>
           <a:p>
+            <a:pPr>
+              <a:spcAft>
+                <a:spcPts val="800"/>
+              </a:spcAft>
+            </a:pPr>
+            <a:r>
+              <a:rPr sz="1700">
+                <a:solidFill>
+                  <a:srgbClr val="595959"/>
+                </a:solidFill>
+                <a:latin typeface="Calibri"/>
+              </a:rPr>
+              <a:t>•  data_preparation - czyszczenie, cechy, enkodowanie</a:t>
+            </a:r>
+          </a:p>
+          <a:p>
+            <a:pPr>
+              <a:spcAft>
+                <a:spcPts val="800"/>
+              </a:spcAft>
+            </a:pPr>
+            <a:r>
+              <a:rPr sz="1700">
+                <a:solidFill>
+                  <a:srgbClr val="595959"/>
+                </a:solidFill>
+                <a:latin typeface="Calibri"/>
+              </a:rPr>
+              <a:t>•  data_modeling - baseline Random Forest + ewaluacja</a:t>
+            </a:r>
+          </a:p>
+          <a:p>
+            <a:pPr>
+              <a:spcAft>
+                <a:spcPts val="800"/>
+              </a:spcAft>
+            </a:pPr>
+            <a:r>
+              <a:rPr sz="1700">
+                <a:solidFill>
+                  <a:srgbClr val="595959"/>
+                </a:solidFill>
+                <a:latin typeface="Calibri"/>
+              </a:rPr>
+              <a:t>•  hyperparameter_tuning - Grid, Random, Optuna</a:t>
+            </a:r>
+          </a:p>
+          <a:p>
+            <a:pPr>
+              <a:spcAft>
+                <a:spcPts val="800"/>
+              </a:spcAft>
+            </a:pPr>
+            <a:r>
+              <a:rPr sz="1700">
+                <a:solidFill>
+                  <a:srgbClr val="595959"/>
+                </a:solidFill>
+                <a:latin typeface="Calibri"/>
+              </a:rPr>
+              <a:t>•  automl - porównanie kilku modeli sklearn</a:t>
+            </a:r>
+          </a:p>
+          <a:p>
+            <a:pPr>
+              <a:spcAft>
+                <a:spcPts val="800"/>
+              </a:spcAft>
+            </a:pPr>
+            <a:r>
+              <a:rPr sz="1700">
+                <a:solidFill>
+                  <a:srgbClr val="595959"/>
+                </a:solidFill>
+                <a:latin typeface="Calibri"/>
+              </a:rPr>
+              <a:t>•  autogluon - AutoML (AutoGluon)</a:t>
+            </a:r>
+          </a:p>
+          <a:p>
+            <a:pPr>
+              <a:spcAft>
+                <a:spcPts val="800"/>
+              </a:spcAft>
+            </a:pPr>
+            <a:r>
+              <a:rPr sz="1700">
+                <a:solidFill>
+                  <a:srgbClr val="595959"/>
+                </a:solidFill>
+                <a:latin typeface="Calibri"/>
+              </a:rPr>
+              <a:t>•  feature_selection - SelectKBest</a:t>
+            </a:r>
+          </a:p>
+        </p:txBody>
+      </p:sp>
+      <p:sp>
+        <p:nvSpPr>
+          <p:cNvPr id="5" name="Rectangle 4"/>
+          <p:cNvSpPr/>
+          <p:nvPr/>
+        </p:nvSpPr>
+        <p:spPr>
+          <a:xfrm>
+            <a:off x="6583680" y="1371600"/>
+            <a:ext cx="5029200" cy="3291840"/>
+          </a:xfrm>
+          <a:prstGeom prst="rect">
+            <a:avLst/>
+          </a:prstGeom>
+          <a:solidFill>
+            <a:srgbClr val="F2F4F8"/>
+          </a:solidFill>
+          <a:ln>
+            <a:solidFill>
+              <a:srgbClr val="6C8EBF"/>
+            </a:solidFill>
+          </a:ln>
+        </p:spPr>
+        <p:style>
+          <a:lnRef idx="1">
+            <a:schemeClr val="accent1"/>
+          </a:lnRef>
+          <a:fillRef idx="3">
+            <a:schemeClr val="accent1"/>
+          </a:fillRef>
+          <a:effectRef idx="2">
+            <a:schemeClr val="accent1"/>
+          </a:effectRef>
+          <a:fontRef idx="minor">
+            <a:schemeClr val="lt1"/>
+          </a:fontRef>
+        </p:style>
+        <p:txBody>
+          <a:bodyPr rtlCol="0" anchor="ctr"/>
+          <a:lstStyle/>
+          <a:p>
+            <a:pPr algn="ctr"/>
+          </a:p>
+        </p:txBody>
+      </p:sp>
+      <p:sp>
+        <p:nvSpPr>
+          <p:cNvPr id="6" name="TextBox 5"/>
+          <p:cNvSpPr txBox="1"/>
+          <p:nvPr/>
+        </p:nvSpPr>
+        <p:spPr>
+          <a:xfrm>
+            <a:off x="6858000" y="1600200"/>
+            <a:ext cx="4572000" cy="2926080"/>
+          </a:xfrm>
+          <a:prstGeom prst="rect">
+            <a:avLst/>
+          </a:prstGeom>
+          <a:noFill/>
+        </p:spPr>
+        <p:txBody>
+          <a:bodyPr wrap="square">
+            <a:spAutoFit/>
+          </a:bodyPr>
+          <a:lstStyle/>
+          <a:p>
             <a:pPr algn="l">
-              <a:defRPr sz="1800" b="0">
-                <a:solidFill>
-                  <a:srgbClr val="2C3E50"/>
-                </a:solidFill>
-              </a:defRPr>
-            </a:pPr>
-            <a:r>
-              <a:t>F1 makro jest tu ważniejsze niż accuracy — mierzymy jak model radzi sobie z rzadkimi klasami.</a:t>
-            </a:r>
-          </a:p>
-          <a:p>
-            <a:pPr>
-              <a:spcBef>
+              <a:spcAft>
                 <a:spcPts val="600"/>
-              </a:spcBef>
-              <a:defRPr sz="1800" b="1">
-                <a:solidFill>
-                  <a:srgbClr val="2C3E50"/>
-                </a:solidFill>
-              </a:defRPr>
-            </a:pPr>
-            <a:r>
-              <a:t>Poprawa F1 makro: 0.33 → 0.46 (+39% vs baseline)</a:t>
-            </a:r>
-          </a:p>
-          <a:p>
-            <a:pPr>
-              <a:spcBef>
+              </a:spcAft>
+            </a:pPr>
+            <a:r>
+              <a:rPr sz="1700" b="1">
+                <a:solidFill>
+                  <a:srgbClr val="2B3A55"/>
+                </a:solidFill>
+                <a:latin typeface="Consolas"/>
+              </a:rPr>
+              <a:t>Uruchomienie:</a:t>
+            </a:r>
+          </a:p>
+          <a:p>
+            <a:pPr algn="l">
+              <a:spcAft>
                 <a:spcPts val="600"/>
-              </a:spcBef>
-              <a:defRPr sz="1400" b="0">
-                <a:solidFill>
-                  <a:srgbClr val="7F8C8D"/>
-                </a:solidFill>
-              </a:defRPr>
-            </a:pPr>
-            <a:r>
-              <a:t>Optuna: 50 prób optymalizacji bayesowskiej</a:t>
+              </a:spcAft>
+            </a:pPr>
+            <a:r>
+              <a:rPr sz="1500" b="0">
+                <a:solidFill>
+                  <a:srgbClr val="595959"/>
+                </a:solidFill>
+                <a:latin typeface="Consolas"/>
+              </a:rPr>
+              <a:t>kedro run</a:t>
+            </a:r>
+          </a:p>
+          <a:p>
+            <a:pPr algn="l">
+              <a:spcAft>
+                <a:spcPts val="600"/>
+              </a:spcAft>
+            </a:pPr>
+            <a:r>
+              <a:rPr sz="1500" b="0">
+                <a:solidFill>
+                  <a:srgbClr val="595959"/>
+                </a:solidFill>
+                <a:latin typeface="Consolas"/>
+              </a:rPr>
+              <a:t>kedro run --pipeline=tuning</a:t>
+            </a:r>
+          </a:p>
+          <a:p>
+            <a:pPr algn="l">
+              <a:spcAft>
+                <a:spcPts val="600"/>
+              </a:spcAft>
+            </a:pPr>
+            <a:r>
+              <a:rPr sz="1500" b="0">
+                <a:solidFill>
+                  <a:srgbClr val="595959"/>
+                </a:solidFill>
+                <a:latin typeface="Consolas"/>
+              </a:rPr>
+              <a:t>kedro run --pipeline=autogluon</a:t>
+            </a:r>
+          </a:p>
+          <a:p>
+            <a:pPr algn="l">
+              <a:spcAft>
+                <a:spcPts val="600"/>
+              </a:spcAft>
+            </a:pPr>
+            <a:r>
+              <a:rPr sz="1500" b="0">
+                <a:solidFill>
+                  <a:srgbClr val="595959"/>
+                </a:solidFill>
+                <a:latin typeface="Consolas"/>
+              </a:rPr>
+              <a:t>mlflow ui</a:t>
+            </a:r>
+          </a:p>
+        </p:txBody>
+      </p:sp>
+      <p:sp>
+        <p:nvSpPr>
+          <p:cNvPr id="7" name="TextBox 6"/>
+          <p:cNvSpPr txBox="1"/>
+          <p:nvPr/>
+        </p:nvSpPr>
+        <p:spPr>
+          <a:xfrm>
+            <a:off x="548640" y="5212080"/>
+            <a:ext cx="11155680" cy="731520"/>
+          </a:xfrm>
+          <a:prstGeom prst="rect">
+            <a:avLst/>
+          </a:prstGeom>
+          <a:noFill/>
+        </p:spPr>
+        <p:txBody>
+          <a:bodyPr wrap="square">
+            <a:spAutoFit/>
+          </a:bodyPr>
+          <a:lstStyle/>
+          <a:p>
+            <a:pPr algn="l">
+              <a:spcAft>
+                <a:spcPts val="600"/>
+              </a:spcAft>
+            </a:pPr>
+            <a:r>
+              <a:rPr sz="1700" b="1">
+                <a:solidFill>
+                  <a:srgbClr val="2B3A55"/>
+                </a:solidFill>
+                <a:latin typeface="Calibri"/>
+              </a:rPr>
+              <a:t>Każdy pipeline loguje parametry i metryki do MLflow - 6 eksperymentów, łatwe porównanie modeli.</a:t>
             </a:r>
           </a:p>
         </p:txBody>
@@ -5013,14 +5686,6 @@
 <file path=ppt/slides/slide7.xml><?xml version="1.0" encoding="utf-8"?>
 <p:sld xmlns:a="http://schemas.openxmlformats.org/drawingml/2006/main" xmlns:p="http://schemas.openxmlformats.org/presentationml/2006/main" xmlns:r="http://schemas.openxmlformats.org/officeDocument/2006/relationships">
   <p:cSld>
-    <p:bg>
-      <p:bgPr>
-        <a:solidFill>
-          <a:srgbClr val="FFFFFF"/>
-        </a:solidFill>
-        <a:effectLst/>
-      </p:bgPr>
-    </p:bg>
     <p:spTree>
       <p:nvGrpSpPr>
         <p:cNvPr id="1" name=""/>
@@ -5030,14 +5695,57 @@
       <p:grpSpPr/>
       <p:sp>
         <p:nvSpPr>
-          <p:cNvPr id="2" name="TextBox 1"/>
+          <p:cNvPr id="2" name="Rectangle 1"/>
+          <p:cNvSpPr/>
+          <p:nvPr/>
+        </p:nvSpPr>
+        <p:spPr>
+          <a:xfrm>
+            <a:off x="0" y="0"/>
+            <a:ext cx="12191695" cy="868680"/>
+          </a:xfrm>
+          <a:prstGeom prst="rect">
+            <a:avLst/>
+          </a:prstGeom>
+          <a:solidFill>
+            <a:srgbClr val="2B3A55"/>
+          </a:solidFill>
+          <a:ln>
+            <a:noFill/>
+          </a:ln>
+        </p:spPr>
+        <p:style>
+          <a:lnRef idx="1">
+            <a:schemeClr val="accent1"/>
+          </a:lnRef>
+          <a:fillRef idx="3">
+            <a:schemeClr val="accent1"/>
+          </a:fillRef>
+          <a:effectRef idx="2">
+            <a:schemeClr val="accent1"/>
+          </a:effectRef>
+          <a:fontRef idx="minor">
+            <a:schemeClr val="lt1"/>
+          </a:fontRef>
+        </p:style>
+        <p:txBody>
+          <a:bodyPr rtlCol="0" anchor="ctr"/>
+          <a:lstStyle/>
+          <a:p>
+            <a:pPr algn="ctr"/>
+          </a:p>
+        </p:txBody>
+      </p:sp>
+      <p:sp>
+        <p:nvSpPr>
+          <p:cNvPr id="3" name="TextBox 2"/>
           <p:cNvSpPr txBox="1"/>
           <p:nvPr/>
         </p:nvSpPr>
         <p:spPr>
           <a:xfrm>
-            <a:off x="731520" y="365760"/>
-            <a:ext cx="7315200" cy="640080"/>
+            <a:off x="502920" y="155448"/>
+            <a:ext cx="10515600" cy="640080"/>
           </a:xfrm>
           <a:prstGeom prst="rect">
             <a:avLst/>
@@ -5051,28 +5759,56 @@
           <a:lstStyle/>
           <a:p>
             <a:pPr algn="l">
-              <a:defRPr sz="3600" b="1">
-                <a:solidFill>
-                  <a:srgbClr val="2C3E50"/>
-                </a:solidFill>
-              </a:defRPr>
-            </a:pPr>
-            <a:r>
-              <a:t>Wdrożenie</a:t>
-            </a:r>
-          </a:p>
-        </p:txBody>
-      </p:sp>
-      <p:sp>
-        <p:nvSpPr>
-          <p:cNvPr id="3" name="TextBox 2"/>
+              <a:spcAft>
+                <a:spcPts val="600"/>
+              </a:spcAft>
+            </a:pPr>
+            <a:r>
+              <a:rPr sz="3000" b="1">
+                <a:solidFill>
+                  <a:srgbClr val="FFFFFF"/>
+                </a:solidFill>
+                <a:latin typeface="Calibri"/>
+              </a:rPr>
+              <a:t>Wyniki modeli</a:t>
+            </a:r>
+          </a:p>
+        </p:txBody>
+      </p:sp>
+      <p:pic>
+        <p:nvPicPr>
+          <p:cNvPr id="4" name="Picture 3" descr="wyniki_chart.png"/>
+          <p:cNvPicPr>
+            <a:picLocks noChangeAspect="1"/>
+          </p:cNvPicPr>
+          <p:nvPr/>
+        </p:nvPicPr>
+        <p:blipFill>
+          <a:blip r:embed="rId2"/>
+          <a:stretch>
+            <a:fillRect/>
+          </a:stretch>
+        </p:blipFill>
+        <p:spPr>
+          <a:xfrm>
+            <a:off x="1188720" y="1097280"/>
+            <a:ext cx="9784080" cy="4623247"/>
+          </a:xfrm>
+          <a:prstGeom prst="rect">
+            <a:avLst/>
+          </a:prstGeom>
+        </p:spPr>
+      </p:pic>
+      <p:sp>
+        <p:nvSpPr>
+          <p:cNvPr id="5" name="TextBox 4"/>
           <p:cNvSpPr txBox="1"/>
           <p:nvPr/>
         </p:nvSpPr>
         <p:spPr>
           <a:xfrm>
-            <a:off x="731520" y="1188720"/>
-            <a:ext cx="5029200" cy="4572000"/>
+            <a:off x="640080" y="5623560"/>
+            <a:ext cx="10972800" cy="914400"/>
           </a:xfrm>
           <a:prstGeom prst="rect">
             <a:avLst/>
@@ -5086,245 +5822,34 @@
           <a:lstStyle/>
           <a:p>
             <a:pPr algn="l">
-              <a:defRPr sz="2200" b="1">
-                <a:solidFill>
-                  <a:srgbClr val="2C3E50"/>
-                </a:solidFill>
-              </a:defRPr>
-            </a:pPr>
-            <a:r>
-              <a:t>API (FastAPI):</a:t>
-            </a:r>
-          </a:p>
-          <a:p>
-            <a:pPr>
-              <a:spcBef>
+              <a:spcAft>
                 <a:spcPts val="600"/>
-              </a:spcBef>
-              <a:defRPr sz="1700" b="0">
-                <a:solidFill>
-                  <a:srgbClr val="2C3E50"/>
-                </a:solidFill>
-              </a:defRPr>
-            </a:pPr>
-            <a:r>
-              <a:t>•  POST /predict — predykcja</a:t>
-            </a:r>
-          </a:p>
-          <a:p>
-            <a:pPr>
-              <a:spcBef>
+              </a:spcAft>
+            </a:pPr>
+            <a:r>
+              <a:rPr sz="1700" b="1">
+                <a:solidFill>
+                  <a:srgbClr val="2B3A55"/>
+                </a:solidFill>
+                <a:latin typeface="Calibri"/>
+              </a:rPr>
+              <a:t>Najlepszy: LightGBM strojony Optuną (50 prób, optymalizacja pod F1 makro).</a:t>
+            </a:r>
+          </a:p>
+          <a:p>
+            <a:pPr algn="l">
+              <a:spcAft>
                 <a:spcPts val="600"/>
-              </a:spcBef>
-              <a:defRPr sz="1700" b="0">
-                <a:solidFill>
-                  <a:srgbClr val="2C3E50"/>
-                </a:solidFill>
-              </a:defRPr>
-            </a:pPr>
-            <a:r>
-              <a:t>•  GET /health — status</a:t>
-            </a:r>
-          </a:p>
-          <a:p>
-            <a:pPr>
-              <a:spcBef>
-                <a:spcPts val="600"/>
-              </a:spcBef>
-              <a:defRPr sz="1700" b="0">
-                <a:solidFill>
-                  <a:srgbClr val="2C3E50"/>
-                </a:solidFill>
-              </a:defRPr>
-            </a:pPr>
-            <a:r>
-              <a:t>•  Swagger UI pod /docs</a:t>
-            </a:r>
-          </a:p>
-          <a:p>
-            <a:pPr>
-              <a:spcBef>
-                <a:spcPts val="600"/>
-              </a:spcBef>
-              <a:defRPr sz="1000" b="0"/>
-            </a:pPr>
-          </a:p>
-          <a:p>
-            <a:pPr>
-              <a:spcBef>
-                <a:spcPts val="600"/>
-              </a:spcBef>
-              <a:defRPr sz="2200" b="1">
-                <a:solidFill>
-                  <a:srgbClr val="2C3E50"/>
-                </a:solidFill>
-              </a:defRPr>
-            </a:pPr>
-            <a:r>
-              <a:t>Docker:</a:t>
-            </a:r>
-          </a:p>
-          <a:p>
-            <a:pPr>
-              <a:spcBef>
-                <a:spcPts val="600"/>
-              </a:spcBef>
-              <a:defRPr sz="1700" b="0">
-                <a:solidFill>
-                  <a:srgbClr val="2C3E50"/>
-                </a:solidFill>
-              </a:defRPr>
-            </a:pPr>
-            <a:r>
-              <a:t>•  Dockerfile + docker-compose</a:t>
-            </a:r>
-          </a:p>
-          <a:p>
-            <a:pPr>
-              <a:spcBef>
-                <a:spcPts val="600"/>
-              </a:spcBef>
-              <a:defRPr sz="1700" b="0">
-                <a:solidFill>
-                  <a:srgbClr val="2C3E50"/>
-                </a:solidFill>
-              </a:defRPr>
-            </a:pPr>
-            <a:r>
-              <a:t>•  docker-compose up --build</a:t>
-            </a:r>
-          </a:p>
-        </p:txBody>
-      </p:sp>
-      <p:sp>
-        <p:nvSpPr>
-          <p:cNvPr id="4" name="TextBox 3"/>
-          <p:cNvSpPr txBox="1"/>
-          <p:nvPr/>
-        </p:nvSpPr>
-        <p:spPr>
-          <a:xfrm>
-            <a:off x="6400800" y="1188720"/>
-            <a:ext cx="5029200" cy="4572000"/>
-          </a:xfrm>
-          <a:prstGeom prst="rect">
-            <a:avLst/>
-          </a:prstGeom>
-          <a:noFill/>
-        </p:spPr>
-        <p:txBody>
-          <a:bodyPr wrap="square">
-            <a:spAutoFit/>
-          </a:bodyPr>
-          <a:lstStyle/>
-          <a:p>
-            <a:pPr algn="l">
-              <a:defRPr sz="2200" b="1">
-                <a:solidFill>
-                  <a:srgbClr val="2C3E50"/>
-                </a:solidFill>
-              </a:defRPr>
-            </a:pPr>
-            <a:r>
-              <a:t>CI/CD (GitHub Actions):</a:t>
-            </a:r>
-          </a:p>
-          <a:p>
-            <a:pPr>
-              <a:spcBef>
-                <a:spcPts val="600"/>
-              </a:spcBef>
-              <a:defRPr sz="1700" b="0">
-                <a:solidFill>
-                  <a:srgbClr val="2C3E50"/>
-                </a:solidFill>
-              </a:defRPr>
-            </a:pPr>
-            <a:r>
-              <a:t>•  CI — ruff (lint) + pytest</a:t>
-            </a:r>
-          </a:p>
-          <a:p>
-            <a:pPr>
-              <a:spcBef>
-                <a:spcPts val="600"/>
-              </a:spcBef>
-              <a:defRPr sz="1700" b="0">
-                <a:solidFill>
-                  <a:srgbClr val="2C3E50"/>
-                </a:solidFill>
-              </a:defRPr>
-            </a:pPr>
-            <a:r>
-              <a:t>•  CD — build Docker → push do GHCR</a:t>
-            </a:r>
-          </a:p>
-          <a:p>
-            <a:pPr>
-              <a:spcBef>
-                <a:spcPts val="600"/>
-              </a:spcBef>
-              <a:defRPr sz="1700" b="0">
-                <a:solidFill>
-                  <a:srgbClr val="2C3E50"/>
-                </a:solidFill>
-              </a:defRPr>
-            </a:pPr>
-            <a:r>
-              <a:t>•  CT — automatyczne retrenowanie</a:t>
-            </a:r>
-          </a:p>
-          <a:p>
-            <a:pPr>
-              <a:spcBef>
-                <a:spcPts val="600"/>
-              </a:spcBef>
-              <a:defRPr sz="1000" b="0"/>
-            </a:pPr>
-          </a:p>
-          <a:p>
-            <a:pPr>
-              <a:spcBef>
-                <a:spcPts val="600"/>
-              </a:spcBef>
-              <a:defRPr sz="2200" b="1">
-                <a:solidFill>
-                  <a:srgbClr val="2C3E50"/>
-                </a:solidFill>
-              </a:defRPr>
-            </a:pPr>
-            <a:r>
-              <a:t>Monitoring:</a:t>
-            </a:r>
-          </a:p>
-          <a:p>
-            <a:pPr>
-              <a:spcBef>
-                <a:spcPts val="600"/>
-              </a:spcBef>
-              <a:defRPr sz="1700" b="0">
-                <a:solidFill>
-                  <a:srgbClr val="2C3E50"/>
-                </a:solidFill>
-              </a:defRPr>
-            </a:pPr>
-            <a:r>
-              <a:t>•  Logowanie każdej predykcji</a:t>
-            </a:r>
-          </a:p>
-          <a:p>
-            <a:pPr>
-              <a:spcBef>
-                <a:spcPts val="600"/>
-              </a:spcBef>
-              <a:defRPr sz="1700" b="0">
-                <a:solidFill>
-                  <a:srgbClr val="2C3E50"/>
-                </a:solidFill>
-              </a:defRPr>
-            </a:pPr>
-            <a:r>
-              <a:t>•  Evidently — wykrywanie driftu</a:t>
+              </a:spcAft>
+            </a:pPr>
+            <a:r>
+              <a:rPr sz="1600" b="0">
+                <a:solidFill>
+                  <a:srgbClr val="595959"/>
+                </a:solidFill>
+                <a:latin typeface="Calibri"/>
+              </a:rPr>
+              <a:t>F1 makro wzrosło z 0.33 (baseline) do 0.47, czyli o ok. 42% - model dużo lepiej łapie klasy rzadkie.</a:t>
             </a:r>
           </a:p>
         </p:txBody>
@@ -5340,14 +5865,6 @@
 <file path=ppt/slides/slide8.xml><?xml version="1.0" encoding="utf-8"?>
 <p:sld xmlns:a="http://schemas.openxmlformats.org/drawingml/2006/main" xmlns:p="http://schemas.openxmlformats.org/presentationml/2006/main" xmlns:r="http://schemas.openxmlformats.org/officeDocument/2006/relationships">
   <p:cSld>
-    <p:bg>
-      <p:bgPr>
-        <a:solidFill>
-          <a:srgbClr val="FFFFFF"/>
-        </a:solidFill>
-        <a:effectLst/>
-      </p:bgPr>
-    </p:bg>
     <p:spTree>
       <p:nvGrpSpPr>
         <p:cNvPr id="1" name=""/>
@@ -5357,14 +5874,57 @@
       <p:grpSpPr/>
       <p:sp>
         <p:nvSpPr>
-          <p:cNvPr id="2" name="TextBox 1"/>
+          <p:cNvPr id="2" name="Rectangle 1"/>
+          <p:cNvSpPr/>
+          <p:nvPr/>
+        </p:nvSpPr>
+        <p:spPr>
+          <a:xfrm>
+            <a:off x="0" y="0"/>
+            <a:ext cx="12191695" cy="868680"/>
+          </a:xfrm>
+          <a:prstGeom prst="rect">
+            <a:avLst/>
+          </a:prstGeom>
+          <a:solidFill>
+            <a:srgbClr val="2B3A55"/>
+          </a:solidFill>
+          <a:ln>
+            <a:noFill/>
+          </a:ln>
+        </p:spPr>
+        <p:style>
+          <a:lnRef idx="1">
+            <a:schemeClr val="accent1"/>
+          </a:lnRef>
+          <a:fillRef idx="3">
+            <a:schemeClr val="accent1"/>
+          </a:fillRef>
+          <a:effectRef idx="2">
+            <a:schemeClr val="accent1"/>
+          </a:effectRef>
+          <a:fontRef idx="minor">
+            <a:schemeClr val="lt1"/>
+          </a:fontRef>
+        </p:style>
+        <p:txBody>
+          <a:bodyPr rtlCol="0" anchor="ctr"/>
+          <a:lstStyle/>
+          <a:p>
+            <a:pPr algn="ctr"/>
+          </a:p>
+        </p:txBody>
+      </p:sp>
+      <p:sp>
+        <p:nvSpPr>
+          <p:cNvPr id="3" name="TextBox 2"/>
           <p:cNvSpPr txBox="1"/>
           <p:nvPr/>
         </p:nvSpPr>
         <p:spPr>
           <a:xfrm>
-            <a:off x="731520" y="365760"/>
-            <a:ext cx="7315200" cy="640080"/>
+            <a:off x="502920" y="155448"/>
+            <a:ext cx="10515600" cy="640080"/>
           </a:xfrm>
           <a:prstGeom prst="rect">
             <a:avLst/>
@@ -5378,28 +5938,32 @@
           <a:lstStyle/>
           <a:p>
             <a:pPr algn="l">
-              <a:defRPr sz="3600" b="1">
-                <a:solidFill>
-                  <a:srgbClr val="2C3E50"/>
-                </a:solidFill>
-              </a:defRPr>
-            </a:pPr>
-            <a:r>
-              <a:t>Użyte technologie</a:t>
-            </a:r>
-          </a:p>
-        </p:txBody>
-      </p:sp>
-      <p:sp>
-        <p:nvSpPr>
-          <p:cNvPr id="3" name="TextBox 2"/>
+              <a:spcAft>
+                <a:spcPts val="600"/>
+              </a:spcAft>
+            </a:pPr>
+            <a:r>
+              <a:rPr sz="3000" b="1">
+                <a:solidFill>
+                  <a:srgbClr val="FFFFFF"/>
+                </a:solidFill>
+                <a:latin typeface="Calibri"/>
+              </a:rPr>
+              <a:t>Aplikacja: API + frontend</a:t>
+            </a:r>
+          </a:p>
+        </p:txBody>
+      </p:sp>
+      <p:sp>
+        <p:nvSpPr>
+          <p:cNvPr id="4" name="TextBox 3"/>
           <p:cNvSpPr txBox="1"/>
           <p:nvPr/>
         </p:nvSpPr>
         <p:spPr>
           <a:xfrm>
-            <a:off x="1371600" y="1371600"/>
-            <a:ext cx="4572000" cy="4572000"/>
+            <a:off x="548640" y="1188720"/>
+            <a:ext cx="5486400" cy="457200"/>
           </a:xfrm>
           <a:prstGeom prst="rect">
             <a:avLst/>
@@ -5413,100 +5977,32 @@
           <a:lstStyle/>
           <a:p>
             <a:pPr algn="l">
-              <a:defRPr sz="1800" b="0">
-                <a:solidFill>
-                  <a:srgbClr val="2C3E50"/>
-                </a:solidFill>
-              </a:defRPr>
-            </a:pPr>
-          </a:p>
-          <a:p>
-            <a:pPr>
-              <a:spcBef>
+              <a:spcAft>
                 <a:spcPts val="600"/>
-              </a:spcBef>
-              <a:defRPr sz="1800" b="0">
-                <a:solidFill>
-                  <a:srgbClr val="2C3E50"/>
-                </a:solidFill>
-              </a:defRPr>
-            </a:pPr>
-            <a:r>
-              <a:t>•  Kedro — pipeline ML</a:t>
-            </a:r>
-          </a:p>
-          <a:p>
-            <a:pPr>
-              <a:spcBef>
-                <a:spcPts val="600"/>
-              </a:spcBef>
-              <a:defRPr sz="1800" b="0">
-                <a:solidFill>
-                  <a:srgbClr val="2C3E50"/>
-                </a:solidFill>
-              </a:defRPr>
-            </a:pPr>
-            <a:r>
-              <a:t>•  scikit-learn — modele bazowe</a:t>
-            </a:r>
-          </a:p>
-          <a:p>
-            <a:pPr>
-              <a:spcBef>
-                <a:spcPts val="600"/>
-              </a:spcBef>
-              <a:defRPr sz="1800" b="0">
-                <a:solidFill>
-                  <a:srgbClr val="2C3E50"/>
-                </a:solidFill>
-              </a:defRPr>
-            </a:pPr>
-            <a:r>
-              <a:t>•  XGBoost, LightGBM — gradient boosting</a:t>
-            </a:r>
-          </a:p>
-          <a:p>
-            <a:pPr>
-              <a:spcBef>
-                <a:spcPts val="600"/>
-              </a:spcBef>
-              <a:defRPr sz="1800" b="0">
-                <a:solidFill>
-                  <a:srgbClr val="2C3E50"/>
-                </a:solidFill>
-              </a:defRPr>
-            </a:pPr>
-            <a:r>
-              <a:t>•  Optuna — strojenie hiperparametrów</a:t>
-            </a:r>
-          </a:p>
-          <a:p>
-            <a:pPr>
-              <a:spcBef>
-                <a:spcPts val="600"/>
-              </a:spcBef>
-              <a:defRPr sz="1800" b="0">
-                <a:solidFill>
-                  <a:srgbClr val="2C3E50"/>
-                </a:solidFill>
-              </a:defRPr>
-            </a:pPr>
-            <a:r>
-              <a:t>•  MLflow — śledzenie eksperymentów</a:t>
-            </a:r>
-          </a:p>
-        </p:txBody>
-      </p:sp>
-      <p:sp>
-        <p:nvSpPr>
-          <p:cNvPr id="4" name="TextBox 3"/>
+              </a:spcAft>
+            </a:pPr>
+            <a:r>
+              <a:rPr sz="1800" b="1">
+                <a:solidFill>
+                  <a:srgbClr val="2B3A55"/>
+                </a:solidFill>
+                <a:latin typeface="Calibri"/>
+              </a:rPr>
+              <a:t>FastAPI:</a:t>
+            </a:r>
+          </a:p>
+        </p:txBody>
+      </p:sp>
+      <p:sp>
+        <p:nvSpPr>
+          <p:cNvPr id="5" name="TextBox 4"/>
           <p:cNvSpPr txBox="1"/>
           <p:nvPr/>
         </p:nvSpPr>
         <p:spPr>
           <a:xfrm>
-            <a:off x="6400800" y="1371600"/>
-            <a:ext cx="4572000" cy="4572000"/>
+            <a:off x="548640" y="1645920"/>
+            <a:ext cx="5486400" cy="5120640"/>
           </a:xfrm>
           <a:prstGeom prst="rect">
             <a:avLst/>
@@ -5519,101 +6015,97 @@
           </a:bodyPr>
           <a:lstStyle/>
           <a:p>
-            <a:pPr algn="l">
-              <a:defRPr sz="1800" b="0">
-                <a:solidFill>
-                  <a:srgbClr val="2C3E50"/>
-                </a:solidFill>
-              </a:defRPr>
-            </a:pPr>
-          </a:p>
-          <a:p>
             <a:pPr>
-              <a:spcBef>
-                <a:spcPts val="600"/>
-              </a:spcBef>
-              <a:defRPr sz="1800" b="0">
-                <a:solidFill>
-                  <a:srgbClr val="2C3E50"/>
-                </a:solidFill>
-              </a:defRPr>
-            </a:pPr>
-            <a:r>
-              <a:t>•  FastAPI — API do predykcji</a:t>
+              <a:spcAft>
+                <a:spcPts val="800"/>
+              </a:spcAft>
+            </a:pPr>
+            <a:r>
+              <a:rPr sz="1700">
+                <a:solidFill>
+                  <a:srgbClr val="595959"/>
+                </a:solidFill>
+                <a:latin typeface="Calibri"/>
+              </a:rPr>
+              <a:t>•  POST /predict - predykcja dla zdarzenia</a:t>
             </a:r>
           </a:p>
           <a:p>
             <a:pPr>
-              <a:spcBef>
-                <a:spcPts val="600"/>
-              </a:spcBef>
-              <a:defRPr sz="1800" b="0">
-                <a:solidFill>
-                  <a:srgbClr val="2C3E50"/>
-                </a:solidFill>
-              </a:defRPr>
-            </a:pPr>
-            <a:r>
-              <a:t>•  Docker — konteneryzacja</a:t>
+              <a:spcAft>
+                <a:spcPts val="800"/>
+              </a:spcAft>
+            </a:pPr>
+            <a:r>
+              <a:rPr sz="1700">
+                <a:solidFill>
+                  <a:srgbClr val="595959"/>
+                </a:solidFill>
+                <a:latin typeface="Calibri"/>
+              </a:rPr>
+              <a:t>•  GET /health - status modelu i enkoderów</a:t>
             </a:r>
           </a:p>
           <a:p>
             <a:pPr>
-              <a:spcBef>
-                <a:spcPts val="600"/>
-              </a:spcBef>
-              <a:defRPr sz="1800" b="0">
-                <a:solidFill>
-                  <a:srgbClr val="2C3E50"/>
-                </a:solidFill>
-              </a:defRPr>
-            </a:pPr>
-            <a:r>
-              <a:t>•  GitHub Actions — CI/CD</a:t>
+              <a:spcAft>
+                <a:spcPts val="800"/>
+              </a:spcAft>
+            </a:pPr>
+            <a:r>
+              <a:rPr sz="1700">
+                <a:solidFill>
+                  <a:srgbClr val="595959"/>
+                </a:solidFill>
+                <a:latin typeface="Calibri"/>
+              </a:rPr>
+              <a:t>•  GET /predictions/recent - log predykcji</a:t>
             </a:r>
           </a:p>
           <a:p>
             <a:pPr>
-              <a:spcBef>
-                <a:spcPts val="600"/>
-              </a:spcBef>
-              <a:defRPr sz="1800" b="0">
-                <a:solidFill>
-                  <a:srgbClr val="2C3E50"/>
-                </a:solidFill>
-              </a:defRPr>
-            </a:pPr>
-            <a:r>
-              <a:t>•  Evidently — monitoring driftu</a:t>
+              <a:spcAft>
+                <a:spcPts val="800"/>
+              </a:spcAft>
+            </a:pPr>
+            <a:r>
+              <a:rPr sz="1700">
+                <a:solidFill>
+                  <a:srgbClr val="595959"/>
+                </a:solidFill>
+                <a:latin typeface="Calibri"/>
+              </a:rPr>
+              <a:t>•  Swagger UI pod /docs</a:t>
             </a:r>
           </a:p>
           <a:p>
             <a:pPr>
-              <a:spcBef>
-                <a:spcPts val="600"/>
-              </a:spcBef>
-              <a:defRPr sz="1800" b="0">
-                <a:solidFill>
-                  <a:srgbClr val="2C3E50"/>
-                </a:solidFill>
-              </a:defRPr>
-            </a:pPr>
-            <a:r>
-              <a:t>•  Jupyter — EDA i eksperymenty</a:t>
-            </a:r>
-          </a:p>
-        </p:txBody>
-      </p:sp>
-      <p:sp>
-        <p:nvSpPr>
-          <p:cNvPr id="5" name="TextBox 4"/>
+              <a:spcAft>
+                <a:spcPts val="800"/>
+              </a:spcAft>
+            </a:pPr>
+            <a:r>
+              <a:rPr sz="1700">
+                <a:solidFill>
+                  <a:srgbClr val="595959"/>
+                </a:solidFill>
+                <a:latin typeface="Calibri"/>
+              </a:rPr>
+              <a:t>•  każda predykcja zapisywana do predictions.jsonl</a:t>
+            </a:r>
+          </a:p>
+        </p:txBody>
+      </p:sp>
+      <p:sp>
+        <p:nvSpPr>
+          <p:cNvPr id="6" name="TextBox 5"/>
           <p:cNvSpPr txBox="1"/>
           <p:nvPr/>
         </p:nvSpPr>
         <p:spPr>
           <a:xfrm>
-            <a:off x="731520" y="5029200"/>
-            <a:ext cx="10058400" cy="457200"/>
+            <a:off x="6309360" y="1188720"/>
+            <a:ext cx="5669280" cy="457200"/>
           </a:xfrm>
           <a:prstGeom prst="rect">
             <a:avLst/>
@@ -5627,14 +6119,144 @@
           <a:lstStyle/>
           <a:p>
             <a:pPr algn="l">
-              <a:defRPr sz="1600" b="0">
-                <a:solidFill>
-                  <a:srgbClr val="7F8C8D"/>
-                </a:solidFill>
-              </a:defRPr>
-            </a:pPr>
-            <a:r>
-              <a:t>Repo: github.com/s19455/ASI-Analiza-wypadkow</a:t>
+              <a:spcAft>
+                <a:spcPts val="600"/>
+              </a:spcAft>
+            </a:pPr>
+            <a:r>
+              <a:rPr sz="1800" b="1">
+                <a:solidFill>
+                  <a:srgbClr val="2B3A55"/>
+                </a:solidFill>
+                <a:latin typeface="Calibri"/>
+              </a:rPr>
+              <a:t>Streamlit:</a:t>
+            </a:r>
+          </a:p>
+        </p:txBody>
+      </p:sp>
+      <p:sp>
+        <p:nvSpPr>
+          <p:cNvPr id="7" name="TextBox 6"/>
+          <p:cNvSpPr txBox="1"/>
+          <p:nvPr/>
+        </p:nvSpPr>
+        <p:spPr>
+          <a:xfrm>
+            <a:off x="6309360" y="1645920"/>
+            <a:ext cx="5669280" cy="5120640"/>
+          </a:xfrm>
+          <a:prstGeom prst="rect">
+            <a:avLst/>
+          </a:prstGeom>
+          <a:noFill/>
+        </p:spPr>
+        <p:txBody>
+          <a:bodyPr wrap="square">
+            <a:spAutoFit/>
+          </a:bodyPr>
+          <a:lstStyle/>
+          <a:p>
+            <a:pPr>
+              <a:spcAft>
+                <a:spcPts val="800"/>
+              </a:spcAft>
+            </a:pPr>
+            <a:r>
+              <a:rPr sz="1700">
+                <a:solidFill>
+                  <a:srgbClr val="595959"/>
+                </a:solidFill>
+                <a:latin typeface="Calibri"/>
+              </a:rPr>
+              <a:t>•  formularz z listami wartości z enkoderów</a:t>
+            </a:r>
+          </a:p>
+          <a:p>
+            <a:pPr>
+              <a:spcAft>
+                <a:spcPts val="800"/>
+              </a:spcAft>
+            </a:pPr>
+            <a:r>
+              <a:rPr sz="1700">
+                <a:solidFill>
+                  <a:srgbClr val="595959"/>
+                </a:solidFill>
+                <a:latin typeface="Calibri"/>
+              </a:rPr>
+              <a:t>•  gotowe scenariusze testowe (np. noc i mokra nawierzchnia)</a:t>
+            </a:r>
+          </a:p>
+          <a:p>
+            <a:pPr>
+              <a:spcAft>
+                <a:spcPts val="800"/>
+              </a:spcAft>
+            </a:pPr>
+            <a:r>
+              <a:rPr sz="1700">
+                <a:solidFill>
+                  <a:srgbClr val="595959"/>
+                </a:solidFill>
+                <a:latin typeface="Calibri"/>
+              </a:rPr>
+              <a:t>•  wynik + prawdopodobieństwa klas na wykresie</a:t>
+            </a:r>
+          </a:p>
+          <a:p>
+            <a:pPr>
+              <a:spcAft>
+                <a:spcPts val="800"/>
+              </a:spcAft>
+            </a:pPr>
+            <a:r>
+              <a:rPr sz="1700">
+                <a:solidFill>
+                  <a:srgbClr val="595959"/>
+                </a:solidFill>
+                <a:latin typeface="Calibri"/>
+              </a:rPr>
+              <a:t>•  historia ostatnich predykcji w panelu bocznym</a:t>
+            </a:r>
+          </a:p>
+        </p:txBody>
+      </p:sp>
+      <p:sp>
+        <p:nvSpPr>
+          <p:cNvPr id="8" name="TextBox 7"/>
+          <p:cNvSpPr txBox="1"/>
+          <p:nvPr/>
+        </p:nvSpPr>
+        <p:spPr>
+          <a:xfrm>
+            <a:off x="548640" y="5303520"/>
+            <a:ext cx="11155680" cy="731520"/>
+          </a:xfrm>
+          <a:prstGeom prst="rect">
+            <a:avLst/>
+          </a:prstGeom>
+          <a:noFill/>
+        </p:spPr>
+        <p:txBody>
+          <a:bodyPr wrap="square">
+            <a:spAutoFit/>
+          </a:bodyPr>
+          <a:lstStyle/>
+          <a:p>
+            <a:pPr algn="l">
+              <a:spcAft>
+                <a:spcPts val="600"/>
+              </a:spcAft>
+            </a:pPr>
+            <a:r>
+              <a:rPr sz="1700" b="1">
+                <a:solidFill>
+                  <a:srgbClr val="2B3A55"/>
+                </a:solidFill>
+                <a:latin typeface="Calibri"/>
+              </a:rPr>
+              <a:t>Całość działa lokalnie albo w Dockerze: docker-compose up --build</a:t>
             </a:r>
           </a:p>
         </p:txBody>
@@ -5650,14 +6272,6 @@
 <file path=ppt/slides/slide9.xml><?xml version="1.0" encoding="utf-8"?>
 <p:sld xmlns:a="http://schemas.openxmlformats.org/drawingml/2006/main" xmlns:p="http://schemas.openxmlformats.org/presentationml/2006/main" xmlns:r="http://schemas.openxmlformats.org/officeDocument/2006/relationships">
   <p:cSld>
-    <p:bg>
-      <p:bgPr>
-        <a:solidFill>
-          <a:srgbClr val="2C3E50"/>
-        </a:solidFill>
-        <a:effectLst/>
-      </p:bgPr>
-    </p:bg>
     <p:spTree>
       <p:nvGrpSpPr>
         <p:cNvPr id="1" name=""/>
@@ -5667,14 +6281,57 @@
       <p:grpSpPr/>
       <p:sp>
         <p:nvSpPr>
-          <p:cNvPr id="2" name="TextBox 1"/>
+          <p:cNvPr id="2" name="Rectangle 1"/>
+          <p:cNvSpPr/>
+          <p:nvPr/>
+        </p:nvSpPr>
+        <p:spPr>
+          <a:xfrm>
+            <a:off x="0" y="0"/>
+            <a:ext cx="12191695" cy="868680"/>
+          </a:xfrm>
+          <a:prstGeom prst="rect">
+            <a:avLst/>
+          </a:prstGeom>
+          <a:solidFill>
+            <a:srgbClr val="2B3A55"/>
+          </a:solidFill>
+          <a:ln>
+            <a:noFill/>
+          </a:ln>
+        </p:spPr>
+        <p:style>
+          <a:lnRef idx="1">
+            <a:schemeClr val="accent1"/>
+          </a:lnRef>
+          <a:fillRef idx="3">
+            <a:schemeClr val="accent1"/>
+          </a:fillRef>
+          <a:effectRef idx="2">
+            <a:schemeClr val="accent1"/>
+          </a:effectRef>
+          <a:fontRef idx="minor">
+            <a:schemeClr val="lt1"/>
+          </a:fontRef>
+        </p:style>
+        <p:txBody>
+          <a:bodyPr rtlCol="0" anchor="ctr"/>
+          <a:lstStyle/>
+          <a:p>
+            <a:pPr algn="ctr"/>
+          </a:p>
+        </p:txBody>
+      </p:sp>
+      <p:sp>
+        <p:nvSpPr>
+          <p:cNvPr id="3" name="TextBox 2"/>
           <p:cNvSpPr txBox="1"/>
           <p:nvPr/>
         </p:nvSpPr>
         <p:spPr>
           <a:xfrm>
-            <a:off x="731520" y="731520"/>
-            <a:ext cx="10728655" cy="731520"/>
+            <a:off x="502920" y="155448"/>
+            <a:ext cx="10515600" cy="640080"/>
           </a:xfrm>
           <a:prstGeom prst="rect">
             <a:avLst/>
@@ -5687,29 +6344,33 @@
           </a:bodyPr>
           <a:lstStyle/>
           <a:p>
-            <a:pPr algn="ctr">
-              <a:defRPr sz="4000" b="1">
+            <a:pPr algn="l">
+              <a:spcAft>
+                <a:spcPts val="600"/>
+              </a:spcAft>
+            </a:pPr>
+            <a:r>
+              <a:rPr sz="3000" b="1">
                 <a:solidFill>
                   <a:srgbClr val="FFFFFF"/>
                 </a:solidFill>
-              </a:defRPr>
-            </a:pPr>
-            <a:r>
-              <a:t>Podsumowanie</a:t>
-            </a:r>
-          </a:p>
-        </p:txBody>
-      </p:sp>
-      <p:sp>
-        <p:nvSpPr>
-          <p:cNvPr id="3" name="TextBox 2"/>
+                <a:latin typeface="Calibri"/>
+              </a:rPr>
+              <a:t>MLOps</a:t>
+            </a:r>
+          </a:p>
+        </p:txBody>
+      </p:sp>
+      <p:sp>
+        <p:nvSpPr>
+          <p:cNvPr id="4" name="TextBox 3"/>
           <p:cNvSpPr txBox="1"/>
           <p:nvPr/>
         </p:nvSpPr>
         <p:spPr>
           <a:xfrm>
-            <a:off x="1097280" y="2103120"/>
-            <a:ext cx="2560320" cy="731520"/>
+            <a:off x="548640" y="1188720"/>
+            <a:ext cx="5486400" cy="457200"/>
           </a:xfrm>
           <a:prstGeom prst="rect">
             <a:avLst/>
@@ -5722,29 +6383,33 @@
           </a:bodyPr>
           <a:lstStyle/>
           <a:p>
-            <a:pPr algn="ctr">
-              <a:defRPr sz="4400" b="1">
-                <a:solidFill>
-                  <a:srgbClr val="3498DB"/>
-                </a:solidFill>
-              </a:defRPr>
-            </a:pPr>
-            <a:r>
-              <a:t>172K</a:t>
-            </a:r>
-          </a:p>
-        </p:txBody>
-      </p:sp>
-      <p:sp>
-        <p:nvSpPr>
-          <p:cNvPr id="4" name="TextBox 3"/>
+            <a:pPr algn="l">
+              <a:spcAft>
+                <a:spcPts val="600"/>
+              </a:spcAft>
+            </a:pPr>
+            <a:r>
+              <a:rPr sz="1800" b="1">
+                <a:solidFill>
+                  <a:srgbClr val="2B3A55"/>
+                </a:solidFill>
+                <a:latin typeface="Calibri"/>
+              </a:rPr>
+              <a:t>GitHub Actions:</a:t>
+            </a:r>
+          </a:p>
+        </p:txBody>
+      </p:sp>
+      <p:sp>
+        <p:nvSpPr>
+          <p:cNvPr id="5" name="TextBox 4"/>
           <p:cNvSpPr txBox="1"/>
           <p:nvPr/>
         </p:nvSpPr>
         <p:spPr>
           <a:xfrm>
-            <a:off x="1097280" y="2834640"/>
-            <a:ext cx="2560320" cy="457200"/>
+            <a:off x="548640" y="1645920"/>
+            <a:ext cx="5486400" cy="5120640"/>
           </a:xfrm>
           <a:prstGeom prst="rect">
             <a:avLst/>
@@ -5757,29 +6422,65 @@
           </a:bodyPr>
           <a:lstStyle/>
           <a:p>
-            <a:pPr algn="ctr">
-              <a:defRPr sz="1800" b="0">
-                <a:solidFill>
-                  <a:srgbClr val="7F8C8D"/>
-                </a:solidFill>
-              </a:defRPr>
-            </a:pPr>
-            <a:r>
-              <a:t>wypadków</a:t>
-            </a:r>
-          </a:p>
-        </p:txBody>
-      </p:sp>
-      <p:sp>
-        <p:nvSpPr>
-          <p:cNvPr id="5" name="TextBox 4"/>
+            <a:pPr>
+              <a:spcAft>
+                <a:spcPts val="800"/>
+              </a:spcAft>
+            </a:pPr>
+            <a:r>
+              <a:rPr sz="1700">
+                <a:solidFill>
+                  <a:srgbClr val="595959"/>
+                </a:solidFill>
+                <a:latin typeface="Calibri"/>
+              </a:rPr>
+              <a:t>•  CI - pytest + ruff + pylint na każdy push</a:t>
+            </a:r>
+          </a:p>
+          <a:p>
+            <a:pPr>
+              <a:spcAft>
+                <a:spcPts val="800"/>
+              </a:spcAft>
+            </a:pPr>
+            <a:r>
+              <a:rPr sz="1700">
+                <a:solidFill>
+                  <a:srgbClr val="595959"/>
+                </a:solidFill>
+                <a:latin typeface="Calibri"/>
+              </a:rPr>
+              <a:t>•  CD - build obrazu Dockera przy tagu v*</a:t>
+            </a:r>
+          </a:p>
+          <a:p>
+            <a:pPr>
+              <a:spcAft>
+                <a:spcPts val="800"/>
+              </a:spcAft>
+            </a:pPr>
+            <a:r>
+              <a:rPr sz="1700">
+                <a:solidFill>
+                  <a:srgbClr val="595959"/>
+                </a:solidFill>
+                <a:latin typeface="Calibri"/>
+              </a:rPr>
+              <a:t>•  CT - cotygodniowy retrening z progiem jakości (F1 ważone &gt;= 0.70)</a:t>
+            </a:r>
+          </a:p>
+        </p:txBody>
+      </p:sp>
+      <p:sp>
+        <p:nvSpPr>
+          <p:cNvPr id="6" name="TextBox 5"/>
           <p:cNvSpPr txBox="1"/>
           <p:nvPr/>
         </p:nvSpPr>
         <p:spPr>
           <a:xfrm>
-            <a:off x="3840480" y="2103120"/>
-            <a:ext cx="2560320" cy="731520"/>
+            <a:off x="6309360" y="1188720"/>
+            <a:ext cx="5669280" cy="457200"/>
           </a:xfrm>
           <a:prstGeom prst="rect">
             <a:avLst/>
@@ -5792,29 +6493,33 @@
           </a:bodyPr>
           <a:lstStyle/>
           <a:p>
-            <a:pPr algn="ctr">
-              <a:defRPr sz="4400" b="1">
-                <a:solidFill>
-                  <a:srgbClr val="3498DB"/>
-                </a:solidFill>
-              </a:defRPr>
-            </a:pPr>
-            <a:r>
-              <a:t>4</a:t>
-            </a:r>
-          </a:p>
-        </p:txBody>
-      </p:sp>
-      <p:sp>
-        <p:nvSpPr>
-          <p:cNvPr id="6" name="TextBox 5"/>
+            <a:pPr algn="l">
+              <a:spcAft>
+                <a:spcPts val="600"/>
+              </a:spcAft>
+            </a:pPr>
+            <a:r>
+              <a:rPr sz="1800" b="1">
+                <a:solidFill>
+                  <a:srgbClr val="2B3A55"/>
+                </a:solidFill>
+                <a:latin typeface="Calibri"/>
+              </a:rPr>
+              <a:t>Monitoring:</a:t>
+            </a:r>
+          </a:p>
+        </p:txBody>
+      </p:sp>
+      <p:sp>
+        <p:nvSpPr>
+          <p:cNvPr id="7" name="TextBox 6"/>
           <p:cNvSpPr txBox="1"/>
           <p:nvPr/>
         </p:nvSpPr>
         <p:spPr>
           <a:xfrm>
-            <a:off x="3840480" y="2834640"/>
-            <a:ext cx="2560320" cy="457200"/>
+            <a:off x="6309360" y="1645920"/>
+            <a:ext cx="5669280" cy="5120640"/>
           </a:xfrm>
           <a:prstGeom prst="rect">
             <a:avLst/>
@@ -5827,29 +6532,65 @@
           </a:bodyPr>
           <a:lstStyle/>
           <a:p>
-            <a:pPr algn="ctr">
-              <a:defRPr sz="1800" b="0">
-                <a:solidFill>
-                  <a:srgbClr val="7F8C8D"/>
-                </a:solidFill>
-              </a:defRPr>
-            </a:pPr>
-            <a:r>
-              <a:t>modele</a:t>
-            </a:r>
-          </a:p>
-        </p:txBody>
-      </p:sp>
-      <p:sp>
-        <p:nvSpPr>
-          <p:cNvPr id="7" name="TextBox 6"/>
+            <a:pPr>
+              <a:spcAft>
+                <a:spcPts val="800"/>
+              </a:spcAft>
+            </a:pPr>
+            <a:r>
+              <a:rPr sz="1700">
+                <a:solidFill>
+                  <a:srgbClr val="595959"/>
+                </a:solidFill>
+                <a:latin typeface="Calibri"/>
+              </a:rPr>
+              <a:t>•  logowanie wszystkich predykcji (JSONL)</a:t>
+            </a:r>
+          </a:p>
+          <a:p>
+            <a:pPr>
+              <a:spcAft>
+                <a:spcPts val="800"/>
+              </a:spcAft>
+            </a:pPr>
+            <a:r>
+              <a:rPr sz="1700">
+                <a:solidFill>
+                  <a:srgbClr val="595959"/>
+                </a:solidFill>
+                <a:latin typeface="Calibri"/>
+              </a:rPr>
+              <a:t>•  wykrywanie driftu danych (Evidently)</a:t>
+            </a:r>
+          </a:p>
+          <a:p>
+            <a:pPr>
+              <a:spcAft>
+                <a:spcPts val="800"/>
+              </a:spcAft>
+            </a:pPr>
+            <a:r>
+              <a:rPr sz="1700">
+                <a:solidFill>
+                  <a:srgbClr val="595959"/>
+                </a:solidFill>
+                <a:latin typeface="Calibri"/>
+              </a:rPr>
+              <a:t>•  raport HTML + podsumowanie JSON</a:t>
+            </a:r>
+          </a:p>
+        </p:txBody>
+      </p:sp>
+      <p:sp>
+        <p:nvSpPr>
+          <p:cNvPr id="8" name="TextBox 7"/>
           <p:cNvSpPr txBox="1"/>
           <p:nvPr/>
         </p:nvSpPr>
         <p:spPr>
           <a:xfrm>
-            <a:off x="6583680" y="2103120"/>
-            <a:ext cx="2560320" cy="731520"/>
+            <a:off x="548640" y="4572000"/>
+            <a:ext cx="11155680" cy="731520"/>
           </a:xfrm>
           <a:prstGeom prst="rect">
             <a:avLst/>
@@ -5862,190 +6603,19 @@
           </a:bodyPr>
           <a:lstStyle/>
           <a:p>
-            <a:pPr algn="ctr">
-              <a:defRPr sz="4400" b="1">
-                <a:solidFill>
-                  <a:srgbClr val="3498DB"/>
-                </a:solidFill>
-              </a:defRPr>
-            </a:pPr>
-            <a:r>
-              <a:t>0.78</a:t>
-            </a:r>
-          </a:p>
-        </p:txBody>
-      </p:sp>
-      <p:sp>
-        <p:nvSpPr>
-          <p:cNvPr id="8" name="TextBox 7"/>
-          <p:cNvSpPr txBox="1"/>
-          <p:nvPr/>
-        </p:nvSpPr>
-        <p:spPr>
-          <a:xfrm>
-            <a:off x="6583680" y="2834640"/>
-            <a:ext cx="2560320" cy="457200"/>
-          </a:xfrm>
-          <a:prstGeom prst="rect">
-            <a:avLst/>
-          </a:prstGeom>
-          <a:noFill/>
-        </p:spPr>
-        <p:txBody>
-          <a:bodyPr wrap="square">
-            <a:spAutoFit/>
-          </a:bodyPr>
-          <a:lstStyle/>
-          <a:p>
-            <a:pPr algn="ctr">
-              <a:defRPr sz="1800" b="0">
-                <a:solidFill>
-                  <a:srgbClr val="7F8C8D"/>
-                </a:solidFill>
-              </a:defRPr>
-            </a:pPr>
-            <a:r>
-              <a:t>F1 ważone</a:t>
-            </a:r>
-          </a:p>
-        </p:txBody>
-      </p:sp>
-      <p:sp>
-        <p:nvSpPr>
-          <p:cNvPr id="9" name="TextBox 8"/>
-          <p:cNvSpPr txBox="1"/>
-          <p:nvPr/>
-        </p:nvSpPr>
-        <p:spPr>
-          <a:xfrm>
-            <a:off x="9326880" y="2103120"/>
-            <a:ext cx="2560320" cy="731520"/>
-          </a:xfrm>
-          <a:prstGeom prst="rect">
-            <a:avLst/>
-          </a:prstGeom>
-          <a:noFill/>
-        </p:spPr>
-        <p:txBody>
-          <a:bodyPr wrap="square">
-            <a:spAutoFit/>
-          </a:bodyPr>
-          <a:lstStyle/>
-          <a:p>
-            <a:pPr algn="ctr">
-              <a:defRPr sz="4400" b="1">
-                <a:solidFill>
-                  <a:srgbClr val="3498DB"/>
-                </a:solidFill>
-              </a:defRPr>
-            </a:pPr>
-            <a:r>
-              <a:t>+39%</a:t>
-            </a:r>
-          </a:p>
-        </p:txBody>
-      </p:sp>
-      <p:sp>
-        <p:nvSpPr>
-          <p:cNvPr id="10" name="TextBox 9"/>
-          <p:cNvSpPr txBox="1"/>
-          <p:nvPr/>
-        </p:nvSpPr>
-        <p:spPr>
-          <a:xfrm>
-            <a:off x="9326880" y="2834640"/>
-            <a:ext cx="2560320" cy="457200"/>
-          </a:xfrm>
-          <a:prstGeom prst="rect">
-            <a:avLst/>
-          </a:prstGeom>
-          <a:noFill/>
-        </p:spPr>
-        <p:txBody>
-          <a:bodyPr wrap="square">
-            <a:spAutoFit/>
-          </a:bodyPr>
-          <a:lstStyle/>
-          <a:p>
-            <a:pPr algn="ctr">
-              <a:defRPr sz="1800" b="0">
-                <a:solidFill>
-                  <a:srgbClr val="7F8C8D"/>
-                </a:solidFill>
-              </a:defRPr>
-            </a:pPr>
-            <a:r>
-              <a:t>poprawa F1 makro</a:t>
-            </a:r>
-          </a:p>
-        </p:txBody>
-      </p:sp>
-      <p:sp>
-        <p:nvSpPr>
-          <p:cNvPr id="11" name="TextBox 10"/>
-          <p:cNvSpPr txBox="1"/>
-          <p:nvPr/>
-        </p:nvSpPr>
-        <p:spPr>
-          <a:xfrm>
-            <a:off x="731520" y="4114800"/>
-            <a:ext cx="10728655" cy="548640"/>
-          </a:xfrm>
-          <a:prstGeom prst="rect">
-            <a:avLst/>
-          </a:prstGeom>
-          <a:noFill/>
-        </p:spPr>
-        <p:txBody>
-          <a:bodyPr wrap="square">
-            <a:spAutoFit/>
-          </a:bodyPr>
-          <a:lstStyle/>
-          <a:p>
-            <a:pPr algn="ctr">
-              <a:defRPr sz="2000" b="0">
-                <a:solidFill>
-                  <a:srgbClr val="FFFFFF"/>
-                </a:solidFill>
-              </a:defRPr>
-            </a:pPr>
-            <a:r>
-              <a:t>Od surowych danych, przez pipeline Kedro, po API w Dockerze z CI/CD</a:t>
-            </a:r>
-          </a:p>
-        </p:txBody>
-      </p:sp>
-      <p:sp>
-        <p:nvSpPr>
-          <p:cNvPr id="12" name="TextBox 11"/>
-          <p:cNvSpPr txBox="1"/>
-          <p:nvPr/>
-        </p:nvSpPr>
-        <p:spPr>
-          <a:xfrm>
-            <a:off x="731520" y="5303520"/>
-            <a:ext cx="10728655" cy="731520"/>
-          </a:xfrm>
-          <a:prstGeom prst="rect">
-            <a:avLst/>
-          </a:prstGeom>
-          <a:noFill/>
-        </p:spPr>
-        <p:txBody>
-          <a:bodyPr wrap="square">
-            <a:spAutoFit/>
-          </a:bodyPr>
-          <a:lstStyle/>
-          <a:p>
-            <a:pPr algn="ctr">
-              <a:defRPr sz="3200" b="1">
-                <a:solidFill>
-                  <a:srgbClr val="3498DB"/>
-                </a:solidFill>
-              </a:defRPr>
-            </a:pPr>
-            <a:r>
-              <a:t>Dziękujemy — pytania?</a:t>
+            <a:pPr algn="l">
+              <a:spcAft>
+                <a:spcPts val="600"/>
+              </a:spcAft>
+            </a:pPr>
+            <a:r>
+              <a:rPr sz="1700" b="1">
+                <a:solidFill>
+                  <a:srgbClr val="2B3A55"/>
+                </a:solidFill>
+                <a:latin typeface="Calibri"/>
+              </a:rPr>
+              <a:t>28 testów jednostkowych, lint bez błędów, obraz Dockera z Pythonem 3.12 (tak jak CI).</a:t>
             </a:r>
           </a:p>
         </p:txBody>
